--- a/presentation/Algorithm for Pyramid model.pptx
+++ b/presentation/Algorithm for Pyramid model.pptx
@@ -149,17 +149,25 @@
 </p188:authorLst>
 </file>
 
+<file path=ppt/revisionInfo.xml><?xml version="1.0" encoding="utf-8"?>
+<p1510:revInfo xmlns:a="http://schemas.openxmlformats.org/drawingml/2006/main" xmlns:r="http://schemas.openxmlformats.org/officeDocument/2006/relationships" xmlns:p1510="http://schemas.microsoft.com/office/powerpoint/2015/10/main">
+  <p1510:revLst>
+    <p1510:client id="{B4B7993D-4481-4681-9BE1-D0312531B530}" v="21" dt="2026-01-29T17:52:46.805"/>
+  </p1510:revLst>
+</p1510:revInfo>
+</file>
+
 <file path=ppt/changesInfos/changesInfo1.xml><?xml version="1.0" encoding="utf-8"?>
 <pc:chgInfo xmlns:a="http://schemas.openxmlformats.org/drawingml/2006/main" xmlns:r="http://schemas.openxmlformats.org/officeDocument/2006/relationships" xmlns:ac="http://schemas.microsoft.com/office/drawing/2013/main/command" xmlns:pc="http://schemas.microsoft.com/office/powerpoint/2013/main/command">
   <pc:docChgLst>
     <pc:chgData name="Hendriks, Rob" userId="c1397476-51d7-416b-9276-de9da7a1b8a6" providerId="ADAL" clId="{5530228B-0BD8-451E-BAD1-66B9143C59C5}"/>
-    <pc:docChg chg="custSel modSld modMainMaster">
-      <pc:chgData name="Hendriks, Rob" userId="c1397476-51d7-416b-9276-de9da7a1b8a6" providerId="ADAL" clId="{5530228B-0BD8-451E-BAD1-66B9143C59C5}" dt="2026-01-02T14:32:34.458" v="21" actId="478"/>
+    <pc:docChg chg="undo custSel modSld modMainMaster">
+      <pc:chgData name="Hendriks, Rob" userId="c1397476-51d7-416b-9276-de9da7a1b8a6" providerId="ADAL" clId="{5530228B-0BD8-451E-BAD1-66B9143C59C5}" dt="2026-01-29T17:53:26.755" v="76" actId="1076"/>
       <pc:docMkLst>
         <pc:docMk/>
       </pc:docMkLst>
-      <pc:sldChg chg="modSp mod">
-        <pc:chgData name="Hendriks, Rob" userId="c1397476-51d7-416b-9276-de9da7a1b8a6" providerId="ADAL" clId="{5530228B-0BD8-451E-BAD1-66B9143C59C5}" dt="2026-01-02T14:31:09.965" v="14" actId="20577"/>
+      <pc:sldChg chg="addSp modSp mod">
+        <pc:chgData name="Hendriks, Rob" userId="c1397476-51d7-416b-9276-de9da7a1b8a6" providerId="ADAL" clId="{5530228B-0BD8-451E-BAD1-66B9143C59C5}" dt="2026-01-29T17:53:26.755" v="76" actId="1076"/>
         <pc:sldMkLst>
           <pc:docMk/>
           <pc:sldMk cId="3106502544" sldId="425"/>
@@ -170,6 +178,14 @@
             <pc:docMk/>
             <pc:sldMk cId="3106502544" sldId="425"/>
             <ac:spMk id="2" creationId="{12041584-F229-D15D-57F4-0C4D45EED130}"/>
+          </ac:spMkLst>
+        </pc:spChg>
+        <pc:spChg chg="add mod">
+          <ac:chgData name="Hendriks, Rob" userId="c1397476-51d7-416b-9276-de9da7a1b8a6" providerId="ADAL" clId="{5530228B-0BD8-451E-BAD1-66B9143C59C5}" dt="2026-01-29T15:49:04.054" v="22"/>
+          <ac:spMkLst>
+            <pc:docMk/>
+            <pc:sldMk cId="3106502544" sldId="425"/>
+            <ac:spMk id="3" creationId="{AC6573CA-B0E8-FDC3-D907-AEA481CF29A2}"/>
           </ac:spMkLst>
         </pc:spChg>
         <pc:spChg chg="mod">
@@ -188,8 +204,32 @@
             <ac:spMk id="15" creationId="{B749BBC8-F0C9-083D-0D48-0B632202D211}"/>
           </ac:spMkLst>
         </pc:spChg>
+        <pc:spChg chg="add mod">
+          <ac:chgData name="Hendriks, Rob" userId="c1397476-51d7-416b-9276-de9da7a1b8a6" providerId="ADAL" clId="{5530228B-0BD8-451E-BAD1-66B9143C59C5}" dt="2026-01-29T15:49:04.054" v="22"/>
+          <ac:spMkLst>
+            <pc:docMk/>
+            <pc:sldMk cId="3106502544" sldId="425"/>
+            <ac:spMk id="19" creationId="{A58E6245-44A5-46B2-CB34-EF4B50DFCCDD}"/>
+          </ac:spMkLst>
+        </pc:spChg>
         <pc:spChg chg="mod">
-          <ac:chgData name="Hendriks, Rob" userId="c1397476-51d7-416b-9276-de9da7a1b8a6" providerId="ADAL" clId="{5530228B-0BD8-451E-BAD1-66B9143C59C5}" dt="2026-01-02T14:31:09.965" v="14" actId="20577"/>
+          <ac:chgData name="Hendriks, Rob" userId="c1397476-51d7-416b-9276-de9da7a1b8a6" providerId="ADAL" clId="{5530228B-0BD8-451E-BAD1-66B9143C59C5}" dt="2026-01-29T17:52:31.031" v="56" actId="1035"/>
+          <ac:spMkLst>
+            <pc:docMk/>
+            <pc:sldMk cId="3106502544" sldId="425"/>
+            <ac:spMk id="21" creationId="{23FAAA42-9FF4-6FE0-97E3-644D3D606460}"/>
+          </ac:spMkLst>
+        </pc:spChg>
+        <pc:spChg chg="mod">
+          <ac:chgData name="Hendriks, Rob" userId="c1397476-51d7-416b-9276-de9da7a1b8a6" providerId="ADAL" clId="{5530228B-0BD8-451E-BAD1-66B9143C59C5}" dt="2026-01-29T15:49:12.519" v="25" actId="164"/>
+          <ac:spMkLst>
+            <pc:docMk/>
+            <pc:sldMk cId="3106502544" sldId="425"/>
+            <ac:spMk id="22" creationId="{3A274794-DAE0-987C-88E2-B93CE1561F14}"/>
+          </ac:spMkLst>
+        </pc:spChg>
+        <pc:spChg chg="mod">
+          <ac:chgData name="Hendriks, Rob" userId="c1397476-51d7-416b-9276-de9da7a1b8a6" providerId="ADAL" clId="{5530228B-0BD8-451E-BAD1-66B9143C59C5}" dt="2026-01-29T15:49:12.519" v="25" actId="164"/>
           <ac:spMkLst>
             <pc:docMk/>
             <pc:sldMk cId="3106502544" sldId="425"/>
@@ -197,13 +237,133 @@
           </ac:spMkLst>
         </pc:spChg>
         <pc:spChg chg="mod">
-          <ac:chgData name="Hendriks, Rob" userId="c1397476-51d7-416b-9276-de9da7a1b8a6" providerId="ADAL" clId="{5530228B-0BD8-451E-BAD1-66B9143C59C5}" dt="2026-01-02T14:27:54.460" v="5" actId="20577"/>
+          <ac:chgData name="Hendriks, Rob" userId="c1397476-51d7-416b-9276-de9da7a1b8a6" providerId="ADAL" clId="{5530228B-0BD8-451E-BAD1-66B9143C59C5}" dt="2026-01-29T17:52:31.031" v="56" actId="1035"/>
+          <ac:spMkLst>
+            <pc:docMk/>
+            <pc:sldMk cId="3106502544" sldId="425"/>
+            <ac:spMk id="27" creationId="{6FA407F0-BBB3-6B24-51E9-2FADD528D71D}"/>
+          </ac:spMkLst>
+        </pc:spChg>
+        <pc:spChg chg="mod">
+          <ac:chgData name="Hendriks, Rob" userId="c1397476-51d7-416b-9276-de9da7a1b8a6" providerId="ADAL" clId="{5530228B-0BD8-451E-BAD1-66B9143C59C5}" dt="2026-01-29T17:52:31.031" v="56" actId="1035"/>
+          <ac:spMkLst>
+            <pc:docMk/>
+            <pc:sldMk cId="3106502544" sldId="425"/>
+            <ac:spMk id="28" creationId="{F0237666-3ECC-D1E7-73E7-E1547790912B}"/>
+          </ac:spMkLst>
+        </pc:spChg>
+        <pc:spChg chg="mod">
+          <ac:chgData name="Hendriks, Rob" userId="c1397476-51d7-416b-9276-de9da7a1b8a6" providerId="ADAL" clId="{5530228B-0BD8-451E-BAD1-66B9143C59C5}" dt="2026-01-29T17:52:31.031" v="56" actId="1035"/>
+          <ac:spMkLst>
+            <pc:docMk/>
+            <pc:sldMk cId="3106502544" sldId="425"/>
+            <ac:spMk id="29" creationId="{54330084-CB8E-CF14-4ECF-2D17E6033645}"/>
+          </ac:spMkLst>
+        </pc:spChg>
+        <pc:spChg chg="mod">
+          <ac:chgData name="Hendriks, Rob" userId="c1397476-51d7-416b-9276-de9da7a1b8a6" providerId="ADAL" clId="{5530228B-0BD8-451E-BAD1-66B9143C59C5}" dt="2026-01-29T17:52:39.241" v="59" actId="1076"/>
+          <ac:spMkLst>
+            <pc:docMk/>
+            <pc:sldMk cId="3106502544" sldId="425"/>
+            <ac:spMk id="31" creationId="{BF6C70CC-FDC6-F4B8-1320-B5C731305C62}"/>
+          </ac:spMkLst>
+        </pc:spChg>
+        <pc:spChg chg="mod">
+          <ac:chgData name="Hendriks, Rob" userId="c1397476-51d7-416b-9276-de9da7a1b8a6" providerId="ADAL" clId="{5530228B-0BD8-451E-BAD1-66B9143C59C5}" dt="2026-01-29T17:53:26.755" v="76" actId="1076"/>
           <ac:spMkLst>
             <pc:docMk/>
             <pc:sldMk cId="3106502544" sldId="425"/>
             <ac:spMk id="33" creationId="{D7EB9410-D872-BD0E-2B87-6A1E468C015D}"/>
           </ac:spMkLst>
         </pc:spChg>
+        <pc:spChg chg="mod">
+          <ac:chgData name="Hendriks, Rob" userId="c1397476-51d7-416b-9276-de9da7a1b8a6" providerId="ADAL" clId="{5530228B-0BD8-451E-BAD1-66B9143C59C5}" dt="2026-01-29T17:52:31.031" v="56" actId="1035"/>
+          <ac:spMkLst>
+            <pc:docMk/>
+            <pc:sldMk cId="3106502544" sldId="425"/>
+            <ac:spMk id="36" creationId="{C9F2F379-A8D3-4254-B798-90BFEF442C61}"/>
+          </ac:spMkLst>
+        </pc:spChg>
+        <pc:spChg chg="mod">
+          <ac:chgData name="Hendriks, Rob" userId="c1397476-51d7-416b-9276-de9da7a1b8a6" providerId="ADAL" clId="{5530228B-0BD8-451E-BAD1-66B9143C59C5}" dt="2026-01-29T17:52:31.031" v="56" actId="1035"/>
+          <ac:spMkLst>
+            <pc:docMk/>
+            <pc:sldMk cId="3106502544" sldId="425"/>
+            <ac:spMk id="37" creationId="{352995A6-6D6A-62C2-81ED-BFDED936D0AB}"/>
+          </ac:spMkLst>
+        </pc:spChg>
+        <pc:spChg chg="add mod">
+          <ac:chgData name="Hendriks, Rob" userId="c1397476-51d7-416b-9276-de9da7a1b8a6" providerId="ADAL" clId="{5530228B-0BD8-451E-BAD1-66B9143C59C5}" dt="2026-01-29T17:52:31.031" v="56" actId="1035"/>
+          <ac:spMkLst>
+            <pc:docMk/>
+            <pc:sldMk cId="3106502544" sldId="425"/>
+            <ac:spMk id="38" creationId="{087C602B-01F8-05DD-D264-3F22E3C51FEF}"/>
+          </ac:spMkLst>
+        </pc:spChg>
+        <pc:spChg chg="add mod">
+          <ac:chgData name="Hendriks, Rob" userId="c1397476-51d7-416b-9276-de9da7a1b8a6" providerId="ADAL" clId="{5530228B-0BD8-451E-BAD1-66B9143C59C5}" dt="2026-01-29T17:53:13.147" v="69" actId="1037"/>
+          <ac:spMkLst>
+            <pc:docMk/>
+            <pc:sldMk cId="3106502544" sldId="425"/>
+            <ac:spMk id="39" creationId="{01BB3F7D-3A25-2467-CEA7-B599F97BCE51}"/>
+          </ac:spMkLst>
+        </pc:spChg>
+        <pc:spChg chg="mod">
+          <ac:chgData name="Hendriks, Rob" userId="c1397476-51d7-416b-9276-de9da7a1b8a6" providerId="ADAL" clId="{5530228B-0BD8-451E-BAD1-66B9143C59C5}" dt="2026-01-29T17:52:31.031" v="56" actId="1035"/>
+          <ac:spMkLst>
+            <pc:docMk/>
+            <pc:sldMk cId="3106502544" sldId="425"/>
+            <ac:spMk id="41" creationId="{7AFE55BB-4F0F-530C-90E7-87E49FA71924}"/>
+          </ac:spMkLst>
+        </pc:spChg>
+        <pc:spChg chg="mod">
+          <ac:chgData name="Hendriks, Rob" userId="c1397476-51d7-416b-9276-de9da7a1b8a6" providerId="ADAL" clId="{5530228B-0BD8-451E-BAD1-66B9143C59C5}" dt="2026-01-29T17:52:31.031" v="56" actId="1035"/>
+          <ac:spMkLst>
+            <pc:docMk/>
+            <pc:sldMk cId="3106502544" sldId="425"/>
+            <ac:spMk id="42" creationId="{5551D40E-F93D-6855-E2C9-FE71E7FC719C}"/>
+          </ac:spMkLst>
+        </pc:spChg>
+        <pc:grpChg chg="add mod">
+          <ac:chgData name="Hendriks, Rob" userId="c1397476-51d7-416b-9276-de9da7a1b8a6" providerId="ADAL" clId="{5530228B-0BD8-451E-BAD1-66B9143C59C5}" dt="2026-01-29T15:49:17.758" v="26" actId="1076"/>
+          <ac:grpSpMkLst>
+            <pc:docMk/>
+            <pc:sldMk cId="3106502544" sldId="425"/>
+            <ac:grpSpMk id="20" creationId="{82917617-5FDA-B028-92D9-ACBFB71021FB}"/>
+          </ac:grpSpMkLst>
+        </pc:grpChg>
+        <pc:grpChg chg="add mod">
+          <ac:chgData name="Hendriks, Rob" userId="c1397476-51d7-416b-9276-de9da7a1b8a6" providerId="ADAL" clId="{5530228B-0BD8-451E-BAD1-66B9143C59C5}" dt="2026-01-29T17:46:11.154" v="34" actId="1076"/>
+          <ac:grpSpMkLst>
+            <pc:docMk/>
+            <pc:sldMk cId="3106502544" sldId="425"/>
+            <ac:grpSpMk id="35" creationId="{B99B4632-66C8-A4CD-1BAE-479A2C091A59}"/>
+          </ac:grpSpMkLst>
+        </pc:grpChg>
+        <pc:grpChg chg="add mod">
+          <ac:chgData name="Hendriks, Rob" userId="c1397476-51d7-416b-9276-de9da7a1b8a6" providerId="ADAL" clId="{5530228B-0BD8-451E-BAD1-66B9143C59C5}" dt="2026-01-29T17:53:10.381" v="67" actId="1076"/>
+          <ac:grpSpMkLst>
+            <pc:docMk/>
+            <pc:sldMk cId="3106502544" sldId="425"/>
+            <ac:grpSpMk id="40" creationId="{688DDA48-991F-2C38-5894-E39DBC333761}"/>
+          </ac:grpSpMkLst>
+        </pc:grpChg>
+        <pc:graphicFrameChg chg="add mod modGraphic">
+          <ac:chgData name="Hendriks, Rob" userId="c1397476-51d7-416b-9276-de9da7a1b8a6" providerId="ADAL" clId="{5530228B-0BD8-451E-BAD1-66B9143C59C5}" dt="2026-01-29T17:53:16.779" v="74" actId="1037"/>
+          <ac:graphicFrameMkLst>
+            <pc:docMk/>
+            <pc:sldMk cId="3106502544" sldId="425"/>
+            <ac:graphicFrameMk id="43" creationId="{504648DE-D8EE-48E1-75A0-937E8E5B1D39}"/>
+          </ac:graphicFrameMkLst>
+        </pc:graphicFrameChg>
+        <pc:picChg chg="mod">
+          <ac:chgData name="Hendriks, Rob" userId="c1397476-51d7-416b-9276-de9da7a1b8a6" providerId="ADAL" clId="{5530228B-0BD8-451E-BAD1-66B9143C59C5}" dt="2026-01-29T17:52:46.805" v="65" actId="1037"/>
+          <ac:picMkLst>
+            <pc:docMk/>
+            <pc:sldMk cId="3106502544" sldId="425"/>
+            <ac:picMk id="13" creationId="{F9CF2CE4-4097-CF07-DD5E-E9C19339F455}"/>
+          </ac:picMkLst>
+        </pc:picChg>
       </pc:sldChg>
       <pc:sldChg chg="modSp mod">
         <pc:chgData name="Hendriks, Rob" userId="c1397476-51d7-416b-9276-de9da7a1b8a6" providerId="ADAL" clId="{5530228B-0BD8-451E-BAD1-66B9143C59C5}" dt="2026-01-02T14:31:34.106" v="16" actId="20577"/>
@@ -242,38 +402,6 @@
           <pc:docMk/>
           <pc:sldMasterMk cId="1043098441" sldId="2147484011"/>
         </pc:sldMasterMkLst>
-        <pc:spChg chg="del">
-          <ac:chgData name="Hendriks, Rob" userId="c1397476-51d7-416b-9276-de9da7a1b8a6" providerId="ADAL" clId="{5530228B-0BD8-451E-BAD1-66B9143C59C5}" dt="2026-01-02T14:32:32.756" v="20" actId="478"/>
-          <ac:spMkLst>
-            <pc:docMk/>
-            <pc:sldMasterMk cId="1043098441" sldId="2147484011"/>
-            <ac:spMk id="2" creationId="{B1528AAF-4F0A-419B-8AAE-5F058B1EDEF5}"/>
-          </ac:spMkLst>
-        </pc:spChg>
-        <pc:spChg chg="del">
-          <ac:chgData name="Hendriks, Rob" userId="c1397476-51d7-416b-9276-de9da7a1b8a6" providerId="ADAL" clId="{5530228B-0BD8-451E-BAD1-66B9143C59C5}" dt="2026-01-02T14:32:34.458" v="21" actId="478"/>
-          <ac:spMkLst>
-            <pc:docMk/>
-            <pc:sldMasterMk cId="1043098441" sldId="2147484011"/>
-            <ac:spMk id="3" creationId="{85343E1D-8E69-45CA-BB05-A8D2AF3930F7}"/>
-          </ac:spMkLst>
-        </pc:spChg>
-        <pc:spChg chg="del mod">
-          <ac:chgData name="Hendriks, Rob" userId="c1397476-51d7-416b-9276-de9da7a1b8a6" providerId="ADAL" clId="{5530228B-0BD8-451E-BAD1-66B9143C59C5}" dt="2026-01-02T14:32:30.751" v="19" actId="478"/>
-          <ac:spMkLst>
-            <pc:docMk/>
-            <pc:sldMasterMk cId="1043098441" sldId="2147484011"/>
-            <ac:spMk id="6" creationId="{59227EF0-9C60-2003-D6BA-C8BAF062178C}"/>
-          </ac:spMkLst>
-        </pc:spChg>
-        <pc:picChg chg="del">
-          <ac:chgData name="Hendriks, Rob" userId="c1397476-51d7-416b-9276-de9da7a1b8a6" providerId="ADAL" clId="{5530228B-0BD8-451E-BAD1-66B9143C59C5}" dt="2026-01-02T14:32:28.678" v="17" actId="478"/>
-          <ac:picMkLst>
-            <pc:docMk/>
-            <pc:sldMasterMk cId="1043098441" sldId="2147484011"/>
-            <ac:picMk id="9" creationId="{26902C94-33CD-D1CE-02FF-FB1D35E386CB}"/>
-          </ac:picMkLst>
-        </pc:picChg>
       </pc:sldMasterChg>
     </pc:docChg>
   </pc:docChgLst>
@@ -380,7 +508,7 @@
                 <a:latin typeface="Calibri" panose="020F0502020204030204" pitchFamily="34" charset="0"/>
                 <a:cs typeface="Calibri" panose="020F0502020204030204" pitchFamily="34" charset="0"/>
               </a:rPr>
-              <a:t>1/2/2026</a:t>
+              <a:t>1/29/2026</a:t>
             </a:fld>
             <a:endParaRPr lang="en-US" dirty="0">
               <a:latin typeface="Calibri" panose="020F0502020204030204" pitchFamily="34" charset="0"/>
@@ -590,7 +718,7 @@
             <a:fld id="{533895C0-2991-1741-81AF-563E5518032A}" type="datetimeFigureOut">
               <a:rPr lang="en-US" smtClean="0"/>
               <a:pPr/>
-              <a:t>1/2/2026</a:t>
+              <a:t>1/29/2026</a:t>
             </a:fld>
             <a:endParaRPr lang="en-US" dirty="0"/>
           </a:p>
@@ -1316,7 +1444,7 @@
         <p:fade/>
       </p:transition>
     </mc:Choice>
-    <mc:Fallback xmlns="" xmlns:a16="http://schemas.microsoft.com/office/drawing/2014/main" xmlns:a14="http://schemas.microsoft.com/office/drawing/2010/main">
+    <mc:Fallback xmlns:a14="http://schemas.microsoft.com/office/drawing/2010/main" xmlns:a16="http://schemas.microsoft.com/office/drawing/2014/main" xmlns="">
       <p:transition>
         <p:fade/>
       </p:transition>
@@ -2574,7 +2702,7 @@
         <p:fade/>
       </p:transition>
     </mc:Choice>
-    <mc:Fallback xmlns="" xmlns:a16="http://schemas.microsoft.com/office/drawing/2014/main">
+    <mc:Fallback xmlns:a16="http://schemas.microsoft.com/office/drawing/2014/main" xmlns="">
       <p:transition>
         <p:fade/>
       </p:transition>
@@ -3027,7 +3155,7 @@
         <p:fade/>
       </p:transition>
     </mc:Choice>
-    <mc:Fallback xmlns="" xmlns:a16="http://schemas.microsoft.com/office/drawing/2014/main" xmlns:a14="http://schemas.microsoft.com/office/drawing/2010/main">
+    <mc:Fallback xmlns:a14="http://schemas.microsoft.com/office/drawing/2010/main" xmlns:a16="http://schemas.microsoft.com/office/drawing/2014/main" xmlns="">
       <p:transition>
         <p:fade/>
       </p:transition>
@@ -3289,7 +3417,7 @@
         <p:fade/>
       </p:transition>
     </mc:Choice>
-    <mc:Fallback xmlns="" xmlns:a16="http://schemas.microsoft.com/office/drawing/2014/main">
+    <mc:Fallback xmlns:a16="http://schemas.microsoft.com/office/drawing/2014/main" xmlns="">
       <p:transition>
         <p:fade/>
       </p:transition>
@@ -3562,7 +3690,7 @@
         <p:fade/>
       </p:transition>
     </mc:Choice>
-    <mc:Fallback xmlns="" xmlns:a16="http://schemas.microsoft.com/office/drawing/2014/main">
+    <mc:Fallback xmlns:a16="http://schemas.microsoft.com/office/drawing/2014/main" xmlns="">
       <p:transition>
         <p:fade/>
       </p:transition>
@@ -4015,7 +4143,7 @@
         <p:fade/>
       </p:transition>
     </mc:Choice>
-    <mc:Fallback xmlns="" xmlns:a16="http://schemas.microsoft.com/office/drawing/2014/main" xmlns:a14="http://schemas.microsoft.com/office/drawing/2010/main">
+    <mc:Fallback xmlns:a14="http://schemas.microsoft.com/office/drawing/2010/main" xmlns:a16="http://schemas.microsoft.com/office/drawing/2014/main" xmlns="">
       <p:transition>
         <p:fade/>
       </p:transition>
@@ -4419,7 +4547,7 @@
         <p:fade/>
       </p:transition>
     </mc:Choice>
-    <mc:Fallback xmlns="" xmlns:a16="http://schemas.microsoft.com/office/drawing/2014/main" xmlns:a14="http://schemas.microsoft.com/office/drawing/2010/main">
+    <mc:Fallback xmlns:a14="http://schemas.microsoft.com/office/drawing/2010/main" xmlns:a16="http://schemas.microsoft.com/office/drawing/2014/main" xmlns="">
       <p:transition>
         <p:fade/>
       </p:transition>
@@ -4645,7 +4773,7 @@
         <p:fade/>
       </p:transition>
     </mc:Choice>
-    <mc:Fallback xmlns="" xmlns:a16="http://schemas.microsoft.com/office/drawing/2014/main">
+    <mc:Fallback xmlns:a16="http://schemas.microsoft.com/office/drawing/2014/main" xmlns="">
       <p:transition>
         <p:fade/>
       </p:transition>
@@ -4860,7 +4988,7 @@
         <p:fade/>
       </p:transition>
     </mc:Choice>
-    <mc:Fallback xmlns="" xmlns:a16="http://schemas.microsoft.com/office/drawing/2014/main">
+    <mc:Fallback xmlns:a16="http://schemas.microsoft.com/office/drawing/2014/main" xmlns="">
       <p:transition>
         <p:fade/>
       </p:transition>
@@ -5264,7 +5392,7 @@
         <p:fade/>
       </p:transition>
     </mc:Choice>
-    <mc:Fallback xmlns="" xmlns:a16="http://schemas.microsoft.com/office/drawing/2014/main" xmlns:a14="http://schemas.microsoft.com/office/drawing/2010/main">
+    <mc:Fallback xmlns:a14="http://schemas.microsoft.com/office/drawing/2010/main" xmlns:a16="http://schemas.microsoft.com/office/drawing/2014/main" xmlns="">
       <p:transition>
         <p:fade/>
       </p:transition>
@@ -5607,7 +5735,7 @@
         <p:fade/>
       </p:transition>
     </mc:Choice>
-    <mc:Fallback xmlns="" xmlns:a16="http://schemas.microsoft.com/office/drawing/2014/main" xmlns:a14="http://schemas.microsoft.com/office/drawing/2010/main">
+    <mc:Fallback xmlns:a14="http://schemas.microsoft.com/office/drawing/2010/main" xmlns:a16="http://schemas.microsoft.com/office/drawing/2014/main" xmlns="">
       <p:transition>
         <p:fade/>
       </p:transition>
@@ -5960,7 +6088,7 @@
         <p:fade/>
       </p:transition>
     </mc:Choice>
-    <mc:Fallback xmlns="" xmlns:a16="http://schemas.microsoft.com/office/drawing/2014/main" xmlns:a14="http://schemas.microsoft.com/office/drawing/2010/main">
+    <mc:Fallback xmlns:a14="http://schemas.microsoft.com/office/drawing/2010/main" xmlns:a16="http://schemas.microsoft.com/office/drawing/2014/main" xmlns="">
       <p:transition>
         <p:fade/>
       </p:transition>
@@ -6113,7 +6241,7 @@
         <p:fade/>
       </p:transition>
     </mc:Choice>
-    <mc:Fallback xmlns="" xmlns:a16="http://schemas.microsoft.com/office/drawing/2014/main" xmlns:p15="http://schemas.microsoft.com/office/powerpoint/2012/main">
+    <mc:Fallback xmlns:p15="http://schemas.microsoft.com/office/powerpoint/2012/main" xmlns:a16="http://schemas.microsoft.com/office/drawing/2014/main" xmlns="">
       <p:transition>
         <p:fade/>
       </p:transition>
@@ -6279,7 +6407,7 @@
         <p:fade/>
       </p:transition>
     </mc:Choice>
-    <mc:Fallback xmlns="" xmlns:a16="http://schemas.microsoft.com/office/drawing/2014/main">
+    <mc:Fallback xmlns:a16="http://schemas.microsoft.com/office/drawing/2014/main" xmlns="">
       <p:transition>
         <p:fade/>
       </p:transition>
@@ -6625,7 +6753,7 @@
         <p:fade/>
       </p:transition>
     </mc:Choice>
-    <mc:Fallback xmlns="" xmlns:a16="http://schemas.microsoft.com/office/drawing/2014/main" xmlns:a14="http://schemas.microsoft.com/office/drawing/2010/main">
+    <mc:Fallback xmlns:a14="http://schemas.microsoft.com/office/drawing/2010/main" xmlns:a16="http://schemas.microsoft.com/office/drawing/2014/main" xmlns="">
       <p:transition>
         <p:fade/>
       </p:transition>
@@ -6889,7 +7017,7 @@
         <p:fade/>
       </p:transition>
     </mc:Choice>
-    <mc:Fallback xmlns="" xmlns:a16="http://schemas.microsoft.com/office/drawing/2014/main">
+    <mc:Fallback xmlns:a16="http://schemas.microsoft.com/office/drawing/2014/main" xmlns="">
       <p:transition>
         <p:fade/>
       </p:transition>
@@ -7203,7 +7331,7 @@
         <p:fade/>
       </p:transition>
     </mc:Choice>
-    <mc:Fallback xmlns="" xmlns:a16="http://schemas.microsoft.com/office/drawing/2014/main">
+    <mc:Fallback xmlns:a16="http://schemas.microsoft.com/office/drawing/2014/main" xmlns="">
       <p:transition>
         <p:fade/>
       </p:transition>
@@ -7583,7 +7711,7 @@
         <p:fade/>
       </p:transition>
     </mc:Choice>
-    <mc:Fallback xmlns="" xmlns:a16="http://schemas.microsoft.com/office/drawing/2014/main">
+    <mc:Fallback xmlns:a16="http://schemas.microsoft.com/office/drawing/2014/main" xmlns="">
       <p:transition>
         <p:fade/>
       </p:transition>
@@ -8594,7 +8722,7 @@
         <p:fade/>
       </p:transition>
     </mc:Choice>
-    <mc:Fallback xmlns="" xmlns:a16="http://schemas.microsoft.com/office/drawing/2014/main">
+    <mc:Fallback xmlns:a16="http://schemas.microsoft.com/office/drawing/2014/main" xmlns="">
       <p:transition>
         <p:fade/>
       </p:transition>
@@ -8927,7 +9055,7 @@
         <p:fade/>
       </p:transition>
     </mc:Choice>
-    <mc:Fallback xmlns="" xmlns:a16="http://schemas.microsoft.com/office/drawing/2014/main">
+    <mc:Fallback xmlns:a16="http://schemas.microsoft.com/office/drawing/2014/main" xmlns="">
       <p:transition>
         <p:fade/>
       </p:transition>
@@ -9869,7 +9997,7 @@
         <p:fade/>
       </p:transition>
     </mc:Choice>
-    <mc:Fallback xmlns="" xmlns:a16="http://schemas.microsoft.com/office/drawing/2014/main">
+    <mc:Fallback xmlns:a16="http://schemas.microsoft.com/office/drawing/2014/main" xmlns="">
       <p:transition>
         <p:fade/>
       </p:transition>
@@ -10005,7 +10133,7 @@
         <p:fade/>
       </p:transition>
     </mc:Choice>
-    <mc:Fallback xmlns="" xmlns:a16="http://schemas.microsoft.com/office/drawing/2014/main">
+    <mc:Fallback xmlns:a16="http://schemas.microsoft.com/office/drawing/2014/main" xmlns="">
       <p:transition>
         <p:fade/>
       </p:transition>
@@ -10358,7 +10486,7 @@
         <p:fade/>
       </p:transition>
     </mc:Choice>
-    <mc:Fallback xmlns="" xmlns:a16="http://schemas.microsoft.com/office/drawing/2014/main" xmlns:a14="http://schemas.microsoft.com/office/drawing/2010/main">
+    <mc:Fallback xmlns:a14="http://schemas.microsoft.com/office/drawing/2010/main" xmlns:a16="http://schemas.microsoft.com/office/drawing/2014/main" xmlns="">
       <p:transition>
         <p:fade/>
       </p:transition>
@@ -10576,7 +10704,7 @@
         <p:fade/>
       </p:transition>
     </mc:Choice>
-    <mc:Fallback xmlns="" xmlns:a16="http://schemas.microsoft.com/office/drawing/2014/main" xmlns:a14="http://schemas.microsoft.com/office/drawing/2010/main">
+    <mc:Fallback xmlns:a14="http://schemas.microsoft.com/office/drawing/2010/main" xmlns:a16="http://schemas.microsoft.com/office/drawing/2014/main" xmlns="">
       <p:transition>
         <p:fade/>
       </p:transition>
@@ -10841,7 +10969,7 @@
         <p:fade/>
       </p:transition>
     </mc:Choice>
-    <mc:Fallback xmlns="" xmlns:a16="http://schemas.microsoft.com/office/drawing/2014/main" xmlns:a14="http://schemas.microsoft.com/office/drawing/2010/main">
+    <mc:Fallback xmlns:a14="http://schemas.microsoft.com/office/drawing/2010/main" xmlns:a16="http://schemas.microsoft.com/office/drawing/2014/main" xmlns="">
       <p:transition>
         <p:fade/>
       </p:transition>
@@ -11598,7 +11726,7 @@
         <p:fade/>
       </p:transition>
     </mc:Choice>
-    <mc:Fallback xmlns="" xmlns:a16="http://schemas.microsoft.com/office/drawing/2014/main" xmlns:a14="http://schemas.microsoft.com/office/drawing/2010/main">
+    <mc:Fallback xmlns:a14="http://schemas.microsoft.com/office/drawing/2010/main" xmlns:a16="http://schemas.microsoft.com/office/drawing/2014/main" xmlns="">
       <p:transition>
         <p:fade/>
       </p:transition>
@@ -11951,7 +12079,7 @@
         <p:fade/>
       </p:transition>
     </mc:Choice>
-    <mc:Fallback xmlns="" xmlns:a16="http://schemas.microsoft.com/office/drawing/2014/main" xmlns:a14="http://schemas.microsoft.com/office/drawing/2010/main" xmlns:p15="http://schemas.microsoft.com/office/powerpoint/2012/main">
+    <mc:Fallback xmlns:p15="http://schemas.microsoft.com/office/powerpoint/2012/main" xmlns:a14="http://schemas.microsoft.com/office/drawing/2010/main" xmlns:a16="http://schemas.microsoft.com/office/drawing/2014/main" xmlns="">
       <p:transition>
         <p:fade/>
       </p:transition>
@@ -12554,7 +12682,7 @@
         <p:fade/>
       </p:transition>
     </mc:Choice>
-    <mc:Fallback xmlns="" xmlns:a16="http://schemas.microsoft.com/office/drawing/2014/main" xmlns:v="urn:schemas-microsoft-com:vml" xmlns:a14="http://schemas.microsoft.com/office/drawing/2010/main" xmlns:p15="http://schemas.microsoft.com/office/powerpoint/2012/main">
+    <mc:Fallback xmlns:p15="http://schemas.microsoft.com/office/powerpoint/2012/main" xmlns:a14="http://schemas.microsoft.com/office/drawing/2010/main" xmlns:v="urn:schemas-microsoft-com:vml" xmlns:a16="http://schemas.microsoft.com/office/drawing/2014/main" xmlns="">
       <p:transition>
         <p:fade/>
       </p:transition>
@@ -13148,7 +13276,7 @@
         <p:fade/>
       </p:transition>
     </mc:Choice>
-    <mc:Fallback xmlns="" xmlns:a16="http://schemas.microsoft.com/office/drawing/2014/main" xmlns:v="urn:schemas-microsoft-com:vml" xmlns:a14="http://schemas.microsoft.com/office/drawing/2010/main" xmlns:p15="http://schemas.microsoft.com/office/powerpoint/2012/main">
+    <mc:Fallback xmlns:p15="http://schemas.microsoft.com/office/powerpoint/2012/main" xmlns:a14="http://schemas.microsoft.com/office/drawing/2010/main" xmlns:v="urn:schemas-microsoft-com:vml" xmlns:a16="http://schemas.microsoft.com/office/drawing/2014/main" xmlns="">
       <p:transition>
         <p:fade/>
       </p:transition>
@@ -13737,7 +13865,7 @@
         <p:fade/>
       </p:transition>
     </mc:Choice>
-    <mc:Fallback xmlns="" xmlns:a16="http://schemas.microsoft.com/office/drawing/2014/main" xmlns:v="urn:schemas-microsoft-com:vml" xmlns:a14="http://schemas.microsoft.com/office/drawing/2010/main" xmlns:p15="http://schemas.microsoft.com/office/powerpoint/2012/main">
+    <mc:Fallback xmlns:p15="http://schemas.microsoft.com/office/powerpoint/2012/main" xmlns:a14="http://schemas.microsoft.com/office/drawing/2010/main" xmlns:v="urn:schemas-microsoft-com:vml" xmlns:a16="http://schemas.microsoft.com/office/drawing/2014/main" xmlns="">
       <p:transition>
         <p:fade/>
       </p:transition>
@@ -14340,7 +14468,7 @@
         <p:fade/>
       </p:transition>
     </mc:Choice>
-    <mc:Fallback xmlns="" xmlns:a16="http://schemas.microsoft.com/office/drawing/2014/main" xmlns:v="urn:schemas-microsoft-com:vml" xmlns:a14="http://schemas.microsoft.com/office/drawing/2010/main" xmlns:p15="http://schemas.microsoft.com/office/powerpoint/2012/main">
+    <mc:Fallback xmlns:p15="http://schemas.microsoft.com/office/powerpoint/2012/main" xmlns:a14="http://schemas.microsoft.com/office/drawing/2010/main" xmlns:v="urn:schemas-microsoft-com:vml" xmlns:a16="http://schemas.microsoft.com/office/drawing/2014/main" xmlns="">
       <p:transition>
         <p:fade/>
       </p:transition>
@@ -15165,7 +15293,7 @@
                     <a:lstStyle/>
                     <a:p>
                       <a:r>
-                        <a:rPr lang="nl-NL"/>
+                        <a:rPr lang="nl-NL" dirty="0"/>
                         <a:t>1</a:t>
                       </a:r>
                     </a:p>
@@ -15335,10 +15463,16 @@
           <p:cNvGraphicFramePr>
             <a:graphicFrameLocks noGrp="1"/>
           </p:cNvGraphicFramePr>
-          <p:nvPr/>
+          <p:nvPr>
+            <p:extLst>
+              <p:ext uri="{D42A27DB-BD31-4B8C-83A1-F6EECF244321}">
+                <p14:modId xmlns:p14="http://schemas.microsoft.com/office/powerpoint/2010/main" val="313345842"/>
+              </p:ext>
+            </p:extLst>
+          </p:nvPr>
         </p:nvGraphicFramePr>
         <p:xfrm>
-          <a:off x="2075616" y="2280973"/>
+          <a:off x="2075616" y="2160654"/>
           <a:ext cx="3660988" cy="370840"/>
         </p:xfrm>
         <a:graphic>
@@ -15469,7 +15603,7 @@
         </p:blipFill>
         <p:spPr bwMode="auto">
           <a:xfrm>
-            <a:off x="2496294" y="2691322"/>
+            <a:off x="2496294" y="2571003"/>
             <a:ext cx="939877" cy="939877"/>
           </a:xfrm>
           <a:prstGeom prst="rect">
@@ -15516,7 +15650,7 @@
         </p:blipFill>
         <p:spPr bwMode="auto">
           <a:xfrm>
-            <a:off x="4351418" y="2713307"/>
+            <a:off x="4351418" y="2592988"/>
             <a:ext cx="939877" cy="939877"/>
           </a:xfrm>
           <a:prstGeom prst="rect">
@@ -15546,10 +15680,16 @@
           <p:cNvGraphicFramePr>
             <a:graphicFrameLocks noGrp="1"/>
           </p:cNvGraphicFramePr>
-          <p:nvPr/>
+          <p:nvPr>
+            <p:extLst>
+              <p:ext uri="{D42A27DB-BD31-4B8C-83A1-F6EECF244321}">
+                <p14:modId xmlns:p14="http://schemas.microsoft.com/office/powerpoint/2010/main" val="3072873468"/>
+              </p:ext>
+            </p:extLst>
+          </p:nvPr>
         </p:nvGraphicFramePr>
         <p:xfrm>
-          <a:off x="2990863" y="3570844"/>
+          <a:off x="2990863" y="3450525"/>
           <a:ext cx="1830494" cy="365760"/>
         </p:xfrm>
         <a:graphic>
@@ -15594,7 +15734,7 @@
                     <a:lstStyle/>
                     <a:p>
                       <a:r>
-                        <a:rPr lang="nl-NL"/>
+                        <a:rPr lang="nl-NL" dirty="0"/>
                         <a:t>0</a:t>
                       </a:r>
                     </a:p>
@@ -15640,7 +15780,7 @@
         </p:blipFill>
         <p:spPr bwMode="auto">
           <a:xfrm>
-            <a:off x="3424280" y="3955248"/>
+            <a:off x="3412248" y="3871025"/>
             <a:ext cx="939877" cy="939877"/>
           </a:xfrm>
           <a:prstGeom prst="rect">
@@ -15883,8 +16023,8 @@
         </p:nvSpPr>
         <p:spPr>
           <a:xfrm>
-            <a:off x="1449494" y="2079417"/>
-            <a:ext cx="514774" cy="365759"/>
+            <a:off x="2723846" y="3295901"/>
+            <a:ext cx="166266" cy="337504"/>
           </a:xfrm>
           <a:custGeom>
             <a:avLst/>
@@ -16027,12 +16167,600 @@
           </a:p>
         </p:txBody>
       </p:sp>
+      <p:grpSp>
+        <p:nvGrpSpPr>
+          <p:cNvPr id="20" name="Group 19">
+            <a:extLst>
+              <a:ext uri="{FF2B5EF4-FFF2-40B4-BE49-F238E27FC236}">
+                <a16:creationId xmlns:a16="http://schemas.microsoft.com/office/drawing/2014/main" id="{82917617-5FDA-B028-92D9-ACBFB71021FB}"/>
+              </a:ext>
+            </a:extLst>
+          </p:cNvPr>
+          <p:cNvGrpSpPr/>
+          <p:nvPr/>
+        </p:nvGrpSpPr>
+        <p:grpSpPr>
+          <a:xfrm>
+            <a:off x="801262" y="1231122"/>
+            <a:ext cx="1151117" cy="1440237"/>
+            <a:chOff x="790095" y="1257029"/>
+            <a:chExt cx="1151117" cy="1440237"/>
+          </a:xfrm>
+        </p:grpSpPr>
+        <p:sp>
+          <p:nvSpPr>
+            <p:cNvPr id="22" name="Freeform: Shape 21">
+              <a:extLst>
+                <a:ext uri="{FF2B5EF4-FFF2-40B4-BE49-F238E27FC236}">
+                  <a16:creationId xmlns:a16="http://schemas.microsoft.com/office/drawing/2014/main" id="{3A274794-DAE0-987C-88E2-B93CE1561F14}"/>
+                </a:ext>
+              </a:extLst>
+            </p:cNvPr>
+            <p:cNvSpPr/>
+            <p:nvPr/>
+          </p:nvSpPr>
+          <p:spPr>
+            <a:xfrm>
+              <a:off x="918438" y="1257029"/>
+              <a:ext cx="1022774" cy="1300479"/>
+            </a:xfrm>
+            <a:custGeom>
+              <a:avLst/>
+              <a:gdLst>
+                <a:gd name="connsiteX0" fmla="*/ 0 w 629920"/>
+                <a:gd name="connsiteY0" fmla="*/ 0 h 298041"/>
+                <a:gd name="connsiteX1" fmla="*/ 270933 w 629920"/>
+                <a:gd name="connsiteY1" fmla="*/ 250613 h 298041"/>
+                <a:gd name="connsiteX2" fmla="*/ 629920 w 629920"/>
+                <a:gd name="connsiteY2" fmla="*/ 298026 h 298041"/>
+                <a:gd name="connsiteX3" fmla="*/ 629920 w 629920"/>
+                <a:gd name="connsiteY3" fmla="*/ 298026 h 298041"/>
+                <a:gd name="connsiteX0" fmla="*/ 0 w 399626"/>
+                <a:gd name="connsiteY0" fmla="*/ 0 h 264159"/>
+                <a:gd name="connsiteX1" fmla="*/ 40639 w 399626"/>
+                <a:gd name="connsiteY1" fmla="*/ 216746 h 264159"/>
+                <a:gd name="connsiteX2" fmla="*/ 399626 w 399626"/>
+                <a:gd name="connsiteY2" fmla="*/ 264159 h 264159"/>
+                <a:gd name="connsiteX3" fmla="*/ 399626 w 399626"/>
+                <a:gd name="connsiteY3" fmla="*/ 264159 h 264159"/>
+                <a:gd name="connsiteX0" fmla="*/ 0 w 399626"/>
+                <a:gd name="connsiteY0" fmla="*/ 0 h 299883"/>
+                <a:gd name="connsiteX1" fmla="*/ 155785 w 399626"/>
+                <a:gd name="connsiteY1" fmla="*/ 284480 h 299883"/>
+                <a:gd name="connsiteX2" fmla="*/ 399626 w 399626"/>
+                <a:gd name="connsiteY2" fmla="*/ 264159 h 299883"/>
+                <a:gd name="connsiteX3" fmla="*/ 399626 w 399626"/>
+                <a:gd name="connsiteY3" fmla="*/ 264159 h 299883"/>
+                <a:gd name="connsiteX0" fmla="*/ 0 w 487680"/>
+                <a:gd name="connsiteY0" fmla="*/ 0 h 292630"/>
+                <a:gd name="connsiteX1" fmla="*/ 243839 w 487680"/>
+                <a:gd name="connsiteY1" fmla="*/ 277706 h 292630"/>
+                <a:gd name="connsiteX2" fmla="*/ 487680 w 487680"/>
+                <a:gd name="connsiteY2" fmla="*/ 257385 h 292630"/>
+                <a:gd name="connsiteX3" fmla="*/ 487680 w 487680"/>
+                <a:gd name="connsiteY3" fmla="*/ 257385 h 292630"/>
+                <a:gd name="connsiteX0" fmla="*/ 0 w 487680"/>
+                <a:gd name="connsiteY0" fmla="*/ 0 h 292630"/>
+                <a:gd name="connsiteX1" fmla="*/ 243839 w 487680"/>
+                <a:gd name="connsiteY1" fmla="*/ 277706 h 292630"/>
+                <a:gd name="connsiteX2" fmla="*/ 487680 w 487680"/>
+                <a:gd name="connsiteY2" fmla="*/ 257385 h 292630"/>
+                <a:gd name="connsiteX3" fmla="*/ 487680 w 487680"/>
+                <a:gd name="connsiteY3" fmla="*/ 257385 h 292630"/>
+                <a:gd name="connsiteX0" fmla="*/ 0 w 480907"/>
+                <a:gd name="connsiteY0" fmla="*/ 0 h 321644"/>
+                <a:gd name="connsiteX1" fmla="*/ 237066 w 480907"/>
+                <a:gd name="connsiteY1" fmla="*/ 304800 h 321644"/>
+                <a:gd name="connsiteX2" fmla="*/ 480907 w 480907"/>
+                <a:gd name="connsiteY2" fmla="*/ 284479 h 321644"/>
+                <a:gd name="connsiteX3" fmla="*/ 480907 w 480907"/>
+                <a:gd name="connsiteY3" fmla="*/ 284479 h 321644"/>
+                <a:gd name="connsiteX0" fmla="*/ 0 w 480907"/>
+                <a:gd name="connsiteY0" fmla="*/ 0 h 1058620"/>
+                <a:gd name="connsiteX1" fmla="*/ 304799 w 480907"/>
+                <a:gd name="connsiteY1" fmla="*/ 1056640 h 1058620"/>
+                <a:gd name="connsiteX2" fmla="*/ 480907 w 480907"/>
+                <a:gd name="connsiteY2" fmla="*/ 284479 h 1058620"/>
+                <a:gd name="connsiteX3" fmla="*/ 480907 w 480907"/>
+                <a:gd name="connsiteY3" fmla="*/ 284479 h 1058620"/>
+                <a:gd name="connsiteX0" fmla="*/ 0 w 1022774"/>
+                <a:gd name="connsiteY0" fmla="*/ 0 h 1300479"/>
+                <a:gd name="connsiteX1" fmla="*/ 304799 w 1022774"/>
+                <a:gd name="connsiteY1" fmla="*/ 1056640 h 1300479"/>
+                <a:gd name="connsiteX2" fmla="*/ 480907 w 1022774"/>
+                <a:gd name="connsiteY2" fmla="*/ 284479 h 1300479"/>
+                <a:gd name="connsiteX3" fmla="*/ 1022774 w 1022774"/>
+                <a:gd name="connsiteY3" fmla="*/ 1300479 h 1300479"/>
+                <a:gd name="connsiteX0" fmla="*/ 0 w 1022774"/>
+                <a:gd name="connsiteY0" fmla="*/ 0 h 1300479"/>
+                <a:gd name="connsiteX1" fmla="*/ 304799 w 1022774"/>
+                <a:gd name="connsiteY1" fmla="*/ 1056640 h 1300479"/>
+                <a:gd name="connsiteX2" fmla="*/ 697653 w 1022774"/>
+                <a:gd name="connsiteY2" fmla="*/ 1273386 h 1300479"/>
+                <a:gd name="connsiteX3" fmla="*/ 1022774 w 1022774"/>
+                <a:gd name="connsiteY3" fmla="*/ 1300479 h 1300479"/>
+              </a:gdLst>
+              <a:ahLst/>
+              <a:cxnLst>
+                <a:cxn ang="0">
+                  <a:pos x="connsiteX0" y="connsiteY0"/>
+                </a:cxn>
+                <a:cxn ang="0">
+                  <a:pos x="connsiteX1" y="connsiteY1"/>
+                </a:cxn>
+                <a:cxn ang="0">
+                  <a:pos x="connsiteX2" y="connsiteY2"/>
+                </a:cxn>
+                <a:cxn ang="0">
+                  <a:pos x="connsiteX3" y="connsiteY3"/>
+                </a:cxn>
+              </a:cxnLst>
+              <a:rect l="l" t="t" r="r" b="b"/>
+              <a:pathLst>
+                <a:path w="1022774" h="1300479">
+                  <a:moveTo>
+                    <a:pt x="0" y="0"/>
+                  </a:moveTo>
+                  <a:cubicBezTo>
+                    <a:pt x="8466" y="147885"/>
+                    <a:pt x="188524" y="844409"/>
+                    <a:pt x="304799" y="1056640"/>
+                  </a:cubicBezTo>
+                  <a:cubicBezTo>
+                    <a:pt x="421075" y="1268871"/>
+                    <a:pt x="697653" y="1273386"/>
+                    <a:pt x="697653" y="1273386"/>
+                  </a:cubicBezTo>
+                  <a:lnTo>
+                    <a:pt x="1022774" y="1300479"/>
+                  </a:lnTo>
+                </a:path>
+              </a:pathLst>
+            </a:custGeom>
+            <a:noFill/>
+            <a:ln w="25400" cap="flat" cmpd="sng" algn="ctr">
+              <a:solidFill>
+                <a:srgbClr val="0D0D0D"/>
+              </a:solidFill>
+              <a:prstDash val="solid"/>
+              <a:headEnd type="none" w="med" len="med"/>
+              <a:tailEnd type="triangle" w="med" len="med"/>
+            </a:ln>
+            <a:effectLst/>
+          </p:spPr>
+          <p:style>
+            <a:lnRef idx="2">
+              <a:schemeClr val="accent1">
+                <a:shade val="50000"/>
+              </a:schemeClr>
+            </a:lnRef>
+            <a:fillRef idx="1">
+              <a:schemeClr val="accent1"/>
+            </a:fillRef>
+            <a:effectRef idx="0">
+              <a:schemeClr val="accent1"/>
+            </a:effectRef>
+            <a:fontRef idx="minor">
+              <a:schemeClr val="lt1"/>
+            </a:fontRef>
+          </p:style>
+          <p:txBody>
+            <a:bodyPr rtlCol="0" anchor="ctr"/>
+            <a:lstStyle/>
+            <a:p>
+              <a:pPr algn="ctr"/>
+              <a:endParaRPr lang="nl-NL"/>
+            </a:p>
+          </p:txBody>
+        </p:sp>
+        <p:sp>
+          <p:nvSpPr>
+            <p:cNvPr id="23" name="TextBox 22">
+              <a:extLst>
+                <a:ext uri="{FF2B5EF4-FFF2-40B4-BE49-F238E27FC236}">
+                  <a16:creationId xmlns:a16="http://schemas.microsoft.com/office/drawing/2014/main" id="{1C85508F-AA38-D277-16B6-895DE582BE35}"/>
+                </a:ext>
+              </a:extLst>
+            </p:cNvPr>
+            <p:cNvSpPr txBox="1"/>
+            <p:nvPr/>
+          </p:nvSpPr>
+          <p:spPr>
+            <a:xfrm>
+              <a:off x="790095" y="2466434"/>
+              <a:ext cx="704039" cy="230832"/>
+            </a:xfrm>
+            <a:prstGeom prst="rect">
+              <a:avLst/>
+            </a:prstGeom>
+            <a:noFill/>
+          </p:spPr>
+          <p:txBody>
+            <a:bodyPr wrap="none" rtlCol="0">
+              <a:spAutoFit/>
+            </a:bodyPr>
+            <a:lstStyle/>
+            <a:p>
+              <a:r>
+                <a:rPr lang="nl-NL" sz="900" dirty="0"/>
+                <a:t>0 </a:t>
+              </a:r>
+              <a:r>
+                <a:rPr lang="nl-NL" sz="900" dirty="0" err="1"/>
+                <a:t>if</a:t>
+              </a:r>
+              <a:r>
+                <a:rPr lang="nl-NL" sz="900" dirty="0"/>
+                <a:t> =, 1 </a:t>
+              </a:r>
+              <a:r>
+                <a:rPr lang="nl-NL" sz="900" dirty="0" err="1"/>
+                <a:t>if</a:t>
+              </a:r>
+              <a:r>
+                <a:rPr lang="nl-NL" sz="900" dirty="0"/>
+                <a:t> </a:t>
+              </a:r>
+              <a:r>
+                <a:rPr lang="nl-NL" sz="900" dirty="0">
+                  <a:latin typeface="Grotesque" panose="020B0504020202020204" pitchFamily="34" charset="0"/>
+                </a:rPr>
+                <a:t>≠</a:t>
+              </a:r>
+              <a:endParaRPr lang="nl-NL" sz="900" dirty="0"/>
+            </a:p>
+          </p:txBody>
+        </p:sp>
+      </p:grpSp>
       <p:sp>
         <p:nvSpPr>
-          <p:cNvPr id="22" name="Freeform: Shape 21">
-            <a:extLst>
-              <a:ext uri="{FF2B5EF4-FFF2-40B4-BE49-F238E27FC236}">
-                <a16:creationId xmlns:a16="http://schemas.microsoft.com/office/drawing/2014/main" id="{3A274794-DAE0-987C-88E2-B93CE1561F14}"/>
+          <p:cNvPr id="24" name="Right Brace 23">
+            <a:extLst>
+              <a:ext uri="{FF2B5EF4-FFF2-40B4-BE49-F238E27FC236}">
+                <a16:creationId xmlns:a16="http://schemas.microsoft.com/office/drawing/2014/main" id="{C1703B1F-D645-D858-4BBC-B486345321FE}"/>
+              </a:ext>
+            </a:extLst>
+          </p:cNvPr>
+          <p:cNvSpPr/>
+          <p:nvPr/>
+        </p:nvSpPr>
+        <p:spPr>
+          <a:xfrm rot="5400000">
+            <a:off x="3085766" y="830876"/>
+            <a:ext cx="155448" cy="914400"/>
+          </a:xfrm>
+          <a:prstGeom prst="rightBrace">
+            <a:avLst/>
+          </a:prstGeom>
+          <a:ln>
+            <a:solidFill>
+              <a:srgbClr val="0D0D0D"/>
+            </a:solidFill>
+          </a:ln>
+        </p:spPr>
+        <p:style>
+          <a:lnRef idx="1">
+            <a:schemeClr val="accent1"/>
+          </a:lnRef>
+          <a:fillRef idx="0">
+            <a:schemeClr val="accent1"/>
+          </a:fillRef>
+          <a:effectRef idx="0">
+            <a:schemeClr val="accent1"/>
+          </a:effectRef>
+          <a:fontRef idx="minor">
+            <a:schemeClr val="tx1"/>
+          </a:fontRef>
+        </p:style>
+        <p:txBody>
+          <a:bodyPr rtlCol="0" anchor="ctr"/>
+          <a:lstStyle/>
+          <a:p>
+            <a:pPr algn="ctr"/>
+            <a:endParaRPr lang="nl-NL"/>
+          </a:p>
+        </p:txBody>
+      </p:sp>
+      <p:sp>
+        <p:nvSpPr>
+          <p:cNvPr id="25" name="Right Brace 24">
+            <a:extLst>
+              <a:ext uri="{FF2B5EF4-FFF2-40B4-BE49-F238E27FC236}">
+                <a16:creationId xmlns:a16="http://schemas.microsoft.com/office/drawing/2014/main" id="{CD4BA000-CD86-C6B1-9843-6F9AE3B41490}"/>
+              </a:ext>
+            </a:extLst>
+          </p:cNvPr>
+          <p:cNvSpPr/>
+          <p:nvPr/>
+        </p:nvSpPr>
+        <p:spPr>
+          <a:xfrm rot="5400000">
+            <a:off x="4589809" y="841454"/>
+            <a:ext cx="155448" cy="914400"/>
+          </a:xfrm>
+          <a:prstGeom prst="rightBrace">
+            <a:avLst/>
+          </a:prstGeom>
+          <a:ln>
+            <a:solidFill>
+              <a:srgbClr val="0D0D0D"/>
+            </a:solidFill>
+          </a:ln>
+        </p:spPr>
+        <p:style>
+          <a:lnRef idx="1">
+            <a:schemeClr val="accent1"/>
+          </a:lnRef>
+          <a:fillRef idx="0">
+            <a:schemeClr val="accent1"/>
+          </a:fillRef>
+          <a:effectRef idx="0">
+            <a:schemeClr val="accent1"/>
+          </a:effectRef>
+          <a:fontRef idx="minor">
+            <a:schemeClr val="tx1"/>
+          </a:fontRef>
+        </p:style>
+        <p:txBody>
+          <a:bodyPr rtlCol="0" anchor="ctr"/>
+          <a:lstStyle/>
+          <a:p>
+            <a:pPr algn="ctr"/>
+            <a:endParaRPr lang="nl-NL"/>
+          </a:p>
+        </p:txBody>
+      </p:sp>
+      <p:sp>
+        <p:nvSpPr>
+          <p:cNvPr id="26" name="Right Brace 25">
+            <a:extLst>
+              <a:ext uri="{FF2B5EF4-FFF2-40B4-BE49-F238E27FC236}">
+                <a16:creationId xmlns:a16="http://schemas.microsoft.com/office/drawing/2014/main" id="{BCC051FC-99DD-28DD-7E6F-FA9865135CAC}"/>
+              </a:ext>
+            </a:extLst>
+          </p:cNvPr>
+          <p:cNvSpPr/>
+          <p:nvPr/>
+        </p:nvSpPr>
+        <p:spPr>
+          <a:xfrm rot="5400000">
+            <a:off x="6102887" y="831436"/>
+            <a:ext cx="155448" cy="914400"/>
+          </a:xfrm>
+          <a:prstGeom prst="rightBrace">
+            <a:avLst/>
+          </a:prstGeom>
+          <a:ln>
+            <a:solidFill>
+              <a:srgbClr val="0D0D0D"/>
+            </a:solidFill>
+          </a:ln>
+        </p:spPr>
+        <p:style>
+          <a:lnRef idx="1">
+            <a:schemeClr val="accent1"/>
+          </a:lnRef>
+          <a:fillRef idx="0">
+            <a:schemeClr val="accent1"/>
+          </a:fillRef>
+          <a:effectRef idx="0">
+            <a:schemeClr val="accent1"/>
+          </a:effectRef>
+          <a:fontRef idx="minor">
+            <a:schemeClr val="tx1"/>
+          </a:fontRef>
+        </p:style>
+        <p:txBody>
+          <a:bodyPr rtlCol="0" anchor="ctr"/>
+          <a:lstStyle/>
+          <a:p>
+            <a:pPr algn="ctr"/>
+            <a:endParaRPr lang="nl-NL"/>
+          </a:p>
+        </p:txBody>
+      </p:sp>
+      <p:sp>
+        <p:nvSpPr>
+          <p:cNvPr id="27" name="Right Brace 26">
+            <a:extLst>
+              <a:ext uri="{FF2B5EF4-FFF2-40B4-BE49-F238E27FC236}">
+                <a16:creationId xmlns:a16="http://schemas.microsoft.com/office/drawing/2014/main" id="{6FA407F0-BBB3-6B24-51E9-2FADD528D71D}"/>
+              </a:ext>
+            </a:extLst>
+          </p:cNvPr>
+          <p:cNvSpPr/>
+          <p:nvPr/>
+        </p:nvSpPr>
+        <p:spPr>
+          <a:xfrm rot="5400000">
+            <a:off x="2900293" y="2143598"/>
+            <a:ext cx="155448" cy="914400"/>
+          </a:xfrm>
+          <a:prstGeom prst="rightBrace">
+            <a:avLst/>
+          </a:prstGeom>
+          <a:ln>
+            <a:solidFill>
+              <a:srgbClr val="0D0D0D"/>
+            </a:solidFill>
+          </a:ln>
+        </p:spPr>
+        <p:style>
+          <a:lnRef idx="1">
+            <a:schemeClr val="accent1"/>
+          </a:lnRef>
+          <a:fillRef idx="0">
+            <a:schemeClr val="accent1"/>
+          </a:fillRef>
+          <a:effectRef idx="0">
+            <a:schemeClr val="accent1"/>
+          </a:effectRef>
+          <a:fontRef idx="minor">
+            <a:schemeClr val="tx1"/>
+          </a:fontRef>
+        </p:style>
+        <p:txBody>
+          <a:bodyPr rtlCol="0" anchor="ctr"/>
+          <a:lstStyle/>
+          <a:p>
+            <a:pPr algn="ctr"/>
+            <a:endParaRPr lang="nl-NL"/>
+          </a:p>
+        </p:txBody>
+      </p:sp>
+      <p:sp>
+        <p:nvSpPr>
+          <p:cNvPr id="28" name="Right Brace 27">
+            <a:extLst>
+              <a:ext uri="{FF2B5EF4-FFF2-40B4-BE49-F238E27FC236}">
+                <a16:creationId xmlns:a16="http://schemas.microsoft.com/office/drawing/2014/main" id="{F0237666-3ECC-D1E7-73E7-E1547790912B}"/>
+              </a:ext>
+            </a:extLst>
+          </p:cNvPr>
+          <p:cNvSpPr/>
+          <p:nvPr/>
+        </p:nvSpPr>
+        <p:spPr>
+          <a:xfrm rot="5400000">
+            <a:off x="4743633" y="2169027"/>
+            <a:ext cx="155448" cy="914400"/>
+          </a:xfrm>
+          <a:prstGeom prst="rightBrace">
+            <a:avLst/>
+          </a:prstGeom>
+          <a:ln>
+            <a:solidFill>
+              <a:srgbClr val="0D0D0D"/>
+            </a:solidFill>
+          </a:ln>
+        </p:spPr>
+        <p:style>
+          <a:lnRef idx="1">
+            <a:schemeClr val="accent1"/>
+          </a:lnRef>
+          <a:fillRef idx="0">
+            <a:schemeClr val="accent1"/>
+          </a:fillRef>
+          <a:effectRef idx="0">
+            <a:schemeClr val="accent1"/>
+          </a:effectRef>
+          <a:fontRef idx="minor">
+            <a:schemeClr val="tx1"/>
+          </a:fontRef>
+        </p:style>
+        <p:txBody>
+          <a:bodyPr rtlCol="0" anchor="ctr"/>
+          <a:lstStyle/>
+          <a:p>
+            <a:pPr algn="ctr"/>
+            <a:endParaRPr lang="nl-NL"/>
+          </a:p>
+        </p:txBody>
+      </p:sp>
+      <p:sp>
+        <p:nvSpPr>
+          <p:cNvPr id="29" name="Right Brace 28">
+            <a:extLst>
+              <a:ext uri="{FF2B5EF4-FFF2-40B4-BE49-F238E27FC236}">
+                <a16:creationId xmlns:a16="http://schemas.microsoft.com/office/drawing/2014/main" id="{54330084-CB8E-CF14-4ECF-2D17E6033645}"/>
+              </a:ext>
+            </a:extLst>
+          </p:cNvPr>
+          <p:cNvSpPr/>
+          <p:nvPr/>
+        </p:nvSpPr>
+        <p:spPr>
+          <a:xfrm rot="5400000">
+            <a:off x="3803937" y="3436809"/>
+            <a:ext cx="155448" cy="914400"/>
+          </a:xfrm>
+          <a:prstGeom prst="rightBrace">
+            <a:avLst/>
+          </a:prstGeom>
+          <a:ln>
+            <a:solidFill>
+              <a:srgbClr val="0D0D0D"/>
+            </a:solidFill>
+          </a:ln>
+        </p:spPr>
+        <p:style>
+          <a:lnRef idx="1">
+            <a:schemeClr val="accent1"/>
+          </a:lnRef>
+          <a:fillRef idx="0">
+            <a:schemeClr val="accent1"/>
+          </a:fillRef>
+          <a:effectRef idx="0">
+            <a:schemeClr val="accent1"/>
+          </a:effectRef>
+          <a:fontRef idx="minor">
+            <a:schemeClr val="tx1"/>
+          </a:fontRef>
+        </p:style>
+        <p:txBody>
+          <a:bodyPr rtlCol="0" anchor="ctr"/>
+          <a:lstStyle/>
+          <a:p>
+            <a:pPr algn="ctr"/>
+            <a:endParaRPr lang="nl-NL"/>
+          </a:p>
+        </p:txBody>
+      </p:sp>
+      <p:sp>
+        <p:nvSpPr>
+          <p:cNvPr id="30" name="Right Brace 29">
+            <a:extLst>
+              <a:ext uri="{FF2B5EF4-FFF2-40B4-BE49-F238E27FC236}">
+                <a16:creationId xmlns:a16="http://schemas.microsoft.com/office/drawing/2014/main" id="{0DFCF1C3-CFA1-F519-0118-20028465B17C}"/>
+              </a:ext>
+            </a:extLst>
+          </p:cNvPr>
+          <p:cNvSpPr/>
+          <p:nvPr/>
+        </p:nvSpPr>
+        <p:spPr>
+          <a:xfrm rot="5400000">
+            <a:off x="1509569" y="840679"/>
+            <a:ext cx="155448" cy="914400"/>
+          </a:xfrm>
+          <a:prstGeom prst="rightBrace">
+            <a:avLst/>
+          </a:prstGeom>
+          <a:ln>
+            <a:solidFill>
+              <a:srgbClr val="0D0D0D"/>
+            </a:solidFill>
+          </a:ln>
+        </p:spPr>
+        <p:style>
+          <a:lnRef idx="1">
+            <a:schemeClr val="accent1"/>
+          </a:lnRef>
+          <a:fillRef idx="0">
+            <a:schemeClr val="accent1"/>
+          </a:fillRef>
+          <a:effectRef idx="0">
+            <a:schemeClr val="accent1"/>
+          </a:effectRef>
+          <a:fontRef idx="minor">
+            <a:schemeClr val="tx1"/>
+          </a:fontRef>
+        </p:style>
+        <p:txBody>
+          <a:bodyPr rtlCol="0" anchor="ctr"/>
+          <a:lstStyle/>
+          <a:p>
+            <a:pPr algn="ctr"/>
+            <a:endParaRPr lang="nl-NL"/>
+          </a:p>
+        </p:txBody>
+      </p:sp>
+      <p:sp>
+        <p:nvSpPr>
+          <p:cNvPr id="31" name="Arrow: Right 30">
+            <a:extLst>
+              <a:ext uri="{FF2B5EF4-FFF2-40B4-BE49-F238E27FC236}">
+                <a16:creationId xmlns:a16="http://schemas.microsoft.com/office/drawing/2014/main" id="{BF6C70CC-FDC6-F4B8-1320-B5C731305C62}"/>
               </a:ext>
             </a:extLst>
           </p:cNvPr>
@@ -16041,8 +16769,451 @@
         </p:nvSpPr>
         <p:spPr>
           <a:xfrm>
-            <a:off x="918438" y="1257029"/>
-            <a:ext cx="1022774" cy="1300479"/>
+            <a:off x="4758196" y="4600346"/>
+            <a:ext cx="978408" cy="484632"/>
+          </a:xfrm>
+          <a:prstGeom prst="rightArrow">
+            <a:avLst/>
+          </a:prstGeom>
+          <a:solidFill>
+            <a:srgbClr val="0089C4"/>
+          </a:solidFill>
+          <a:ln w="25400" cap="flat" cmpd="sng" algn="ctr">
+            <a:solidFill>
+              <a:srgbClr val="0089C4"/>
+            </a:solidFill>
+            <a:prstDash val="solid"/>
+          </a:ln>
+          <a:effectLst/>
+        </p:spPr>
+        <p:style>
+          <a:lnRef idx="2">
+            <a:schemeClr val="accent1">
+              <a:shade val="50000"/>
+            </a:schemeClr>
+          </a:lnRef>
+          <a:fillRef idx="1">
+            <a:schemeClr val="accent1"/>
+          </a:fillRef>
+          <a:effectRef idx="0">
+            <a:schemeClr val="accent1"/>
+          </a:effectRef>
+          <a:fontRef idx="minor">
+            <a:schemeClr val="lt1"/>
+          </a:fontRef>
+        </p:style>
+        <p:txBody>
+          <a:bodyPr rtlCol="0" anchor="ctr"/>
+          <a:lstStyle/>
+          <a:p>
+            <a:pPr algn="ctr"/>
+            <a:endParaRPr lang="nl-NL"/>
+          </a:p>
+        </p:txBody>
+      </p:sp>
+      <p:sp>
+        <p:nvSpPr>
+          <p:cNvPr id="32" name="TextBox 31">
+            <a:extLst>
+              <a:ext uri="{FF2B5EF4-FFF2-40B4-BE49-F238E27FC236}">
+                <a16:creationId xmlns:a16="http://schemas.microsoft.com/office/drawing/2014/main" id="{96EF3AB2-3889-AD39-26A4-C1D798052A20}"/>
+              </a:ext>
+            </a:extLst>
+          </p:cNvPr>
+          <p:cNvSpPr txBox="1"/>
+          <p:nvPr/>
+        </p:nvSpPr>
+        <p:spPr>
+          <a:xfrm>
+            <a:off x="7579422" y="390928"/>
+            <a:ext cx="1388943" cy="369332"/>
+          </a:xfrm>
+          <a:prstGeom prst="rect">
+            <a:avLst/>
+          </a:prstGeom>
+          <a:noFill/>
+        </p:spPr>
+        <p:txBody>
+          <a:bodyPr wrap="square" rtlCol="0">
+            <a:spAutoFit/>
+          </a:bodyPr>
+          <a:lstStyle/>
+          <a:p>
+            <a:r>
+              <a:rPr lang="nl-NL"/>
+              <a:t>Original bits</a:t>
+            </a:r>
+          </a:p>
+        </p:txBody>
+      </p:sp>
+      <p:sp>
+        <p:nvSpPr>
+          <p:cNvPr id="33" name="TextBox 32">
+            <a:extLst>
+              <a:ext uri="{FF2B5EF4-FFF2-40B4-BE49-F238E27FC236}">
+                <a16:creationId xmlns:a16="http://schemas.microsoft.com/office/drawing/2014/main" id="{D7EB9410-D872-BD0E-2B87-6A1E468C015D}"/>
+              </a:ext>
+            </a:extLst>
+          </p:cNvPr>
+          <p:cNvSpPr txBox="1"/>
+          <p:nvPr/>
+        </p:nvSpPr>
+        <p:spPr>
+          <a:xfrm>
+            <a:off x="5710672" y="4681929"/>
+            <a:ext cx="3027680" cy="300082"/>
+          </a:xfrm>
+          <a:prstGeom prst="rect">
+            <a:avLst/>
+          </a:prstGeom>
+          <a:noFill/>
+        </p:spPr>
+        <p:txBody>
+          <a:bodyPr wrap="square" rtlCol="0">
+            <a:spAutoFit/>
+          </a:bodyPr>
+          <a:lstStyle/>
+          <a:p>
+            <a:r>
+              <a:rPr lang="nl-NL" dirty="0"/>
+              <a:t>Output is </a:t>
+            </a:r>
+            <a:r>
+              <a:rPr lang="nl-NL" dirty="0" err="1"/>
+              <a:t>communicated</a:t>
+            </a:r>
+            <a:r>
+              <a:rPr lang="nl-NL" dirty="0"/>
+              <a:t> </a:t>
+            </a:r>
+            <a:r>
+              <a:rPr lang="nl-NL" dirty="0" err="1"/>
+              <a:t>to</a:t>
+            </a:r>
+            <a:r>
+              <a:rPr lang="nl-NL" dirty="0"/>
+              <a:t> Bob</a:t>
+            </a:r>
+          </a:p>
+        </p:txBody>
+      </p:sp>
+      <p:sp>
+        <p:nvSpPr>
+          <p:cNvPr id="34" name="Arrow: Right 33">
+            <a:extLst>
+              <a:ext uri="{FF2B5EF4-FFF2-40B4-BE49-F238E27FC236}">
+                <a16:creationId xmlns:a16="http://schemas.microsoft.com/office/drawing/2014/main" id="{66DAC1B2-4240-9630-7676-3FFA41A094B2}"/>
+              </a:ext>
+            </a:extLst>
+          </p:cNvPr>
+          <p:cNvSpPr/>
+          <p:nvPr/>
+        </p:nvSpPr>
+        <p:spPr>
+          <a:xfrm rot="10800000">
+            <a:off x="7090218" y="744406"/>
+            <a:ext cx="978408" cy="484632"/>
+          </a:xfrm>
+          <a:prstGeom prst="rightArrow">
+            <a:avLst/>
+          </a:prstGeom>
+          <a:solidFill>
+            <a:srgbClr val="0089C4"/>
+          </a:solidFill>
+          <a:ln w="25400" cap="flat" cmpd="sng" algn="ctr">
+            <a:solidFill>
+              <a:srgbClr val="0089C4"/>
+            </a:solidFill>
+            <a:prstDash val="solid"/>
+          </a:ln>
+          <a:effectLst/>
+        </p:spPr>
+        <p:style>
+          <a:lnRef idx="2">
+            <a:schemeClr val="accent1">
+              <a:shade val="50000"/>
+            </a:schemeClr>
+          </a:lnRef>
+          <a:fillRef idx="1">
+            <a:schemeClr val="accent1"/>
+          </a:fillRef>
+          <a:effectRef idx="0">
+            <a:schemeClr val="accent1"/>
+          </a:effectRef>
+          <a:fontRef idx="minor">
+            <a:schemeClr val="lt1"/>
+          </a:fontRef>
+        </p:style>
+        <p:txBody>
+          <a:bodyPr rtlCol="0" anchor="ctr"/>
+          <a:lstStyle/>
+          <a:p>
+            <a:pPr algn="ctr"/>
+            <a:endParaRPr lang="nl-NL"/>
+          </a:p>
+        </p:txBody>
+      </p:sp>
+      <p:grpSp>
+        <p:nvGrpSpPr>
+          <p:cNvPr id="35" name="Group 34">
+            <a:extLst>
+              <a:ext uri="{FF2B5EF4-FFF2-40B4-BE49-F238E27FC236}">
+                <a16:creationId xmlns:a16="http://schemas.microsoft.com/office/drawing/2014/main" id="{B99B4632-66C8-A4CD-1BAE-479A2C091A59}"/>
+              </a:ext>
+            </a:extLst>
+          </p:cNvPr>
+          <p:cNvGrpSpPr/>
+          <p:nvPr/>
+        </p:nvGrpSpPr>
+        <p:grpSpPr>
+          <a:xfrm>
+            <a:off x="1864268" y="2626227"/>
+            <a:ext cx="1021875" cy="1210910"/>
+            <a:chOff x="919336" y="1443925"/>
+            <a:chExt cx="1021875" cy="1246582"/>
+          </a:xfrm>
+        </p:grpSpPr>
+        <p:sp>
+          <p:nvSpPr>
+            <p:cNvPr id="36" name="Freeform: Shape 35">
+              <a:extLst>
+                <a:ext uri="{FF2B5EF4-FFF2-40B4-BE49-F238E27FC236}">
+                  <a16:creationId xmlns:a16="http://schemas.microsoft.com/office/drawing/2014/main" id="{C9F2F379-A8D3-4254-B798-90BFEF442C61}"/>
+                </a:ext>
+              </a:extLst>
+            </p:cNvPr>
+            <p:cNvSpPr/>
+            <p:nvPr/>
+          </p:nvSpPr>
+          <p:spPr>
+            <a:xfrm>
+              <a:off x="1305540" y="1443925"/>
+              <a:ext cx="635671" cy="1113583"/>
+            </a:xfrm>
+            <a:custGeom>
+              <a:avLst/>
+              <a:gdLst>
+                <a:gd name="connsiteX0" fmla="*/ 0 w 629920"/>
+                <a:gd name="connsiteY0" fmla="*/ 0 h 298041"/>
+                <a:gd name="connsiteX1" fmla="*/ 270933 w 629920"/>
+                <a:gd name="connsiteY1" fmla="*/ 250613 h 298041"/>
+                <a:gd name="connsiteX2" fmla="*/ 629920 w 629920"/>
+                <a:gd name="connsiteY2" fmla="*/ 298026 h 298041"/>
+                <a:gd name="connsiteX3" fmla="*/ 629920 w 629920"/>
+                <a:gd name="connsiteY3" fmla="*/ 298026 h 298041"/>
+                <a:gd name="connsiteX0" fmla="*/ 0 w 399626"/>
+                <a:gd name="connsiteY0" fmla="*/ 0 h 264159"/>
+                <a:gd name="connsiteX1" fmla="*/ 40639 w 399626"/>
+                <a:gd name="connsiteY1" fmla="*/ 216746 h 264159"/>
+                <a:gd name="connsiteX2" fmla="*/ 399626 w 399626"/>
+                <a:gd name="connsiteY2" fmla="*/ 264159 h 264159"/>
+                <a:gd name="connsiteX3" fmla="*/ 399626 w 399626"/>
+                <a:gd name="connsiteY3" fmla="*/ 264159 h 264159"/>
+                <a:gd name="connsiteX0" fmla="*/ 0 w 399626"/>
+                <a:gd name="connsiteY0" fmla="*/ 0 h 299883"/>
+                <a:gd name="connsiteX1" fmla="*/ 155785 w 399626"/>
+                <a:gd name="connsiteY1" fmla="*/ 284480 h 299883"/>
+                <a:gd name="connsiteX2" fmla="*/ 399626 w 399626"/>
+                <a:gd name="connsiteY2" fmla="*/ 264159 h 299883"/>
+                <a:gd name="connsiteX3" fmla="*/ 399626 w 399626"/>
+                <a:gd name="connsiteY3" fmla="*/ 264159 h 299883"/>
+                <a:gd name="connsiteX0" fmla="*/ 0 w 487680"/>
+                <a:gd name="connsiteY0" fmla="*/ 0 h 292630"/>
+                <a:gd name="connsiteX1" fmla="*/ 243839 w 487680"/>
+                <a:gd name="connsiteY1" fmla="*/ 277706 h 292630"/>
+                <a:gd name="connsiteX2" fmla="*/ 487680 w 487680"/>
+                <a:gd name="connsiteY2" fmla="*/ 257385 h 292630"/>
+                <a:gd name="connsiteX3" fmla="*/ 487680 w 487680"/>
+                <a:gd name="connsiteY3" fmla="*/ 257385 h 292630"/>
+                <a:gd name="connsiteX0" fmla="*/ 0 w 487680"/>
+                <a:gd name="connsiteY0" fmla="*/ 0 h 292630"/>
+                <a:gd name="connsiteX1" fmla="*/ 243839 w 487680"/>
+                <a:gd name="connsiteY1" fmla="*/ 277706 h 292630"/>
+                <a:gd name="connsiteX2" fmla="*/ 487680 w 487680"/>
+                <a:gd name="connsiteY2" fmla="*/ 257385 h 292630"/>
+                <a:gd name="connsiteX3" fmla="*/ 487680 w 487680"/>
+                <a:gd name="connsiteY3" fmla="*/ 257385 h 292630"/>
+                <a:gd name="connsiteX0" fmla="*/ 0 w 480907"/>
+                <a:gd name="connsiteY0" fmla="*/ 0 h 321644"/>
+                <a:gd name="connsiteX1" fmla="*/ 237066 w 480907"/>
+                <a:gd name="connsiteY1" fmla="*/ 304800 h 321644"/>
+                <a:gd name="connsiteX2" fmla="*/ 480907 w 480907"/>
+                <a:gd name="connsiteY2" fmla="*/ 284479 h 321644"/>
+                <a:gd name="connsiteX3" fmla="*/ 480907 w 480907"/>
+                <a:gd name="connsiteY3" fmla="*/ 284479 h 321644"/>
+                <a:gd name="connsiteX0" fmla="*/ 0 w 480907"/>
+                <a:gd name="connsiteY0" fmla="*/ 0 h 1058620"/>
+                <a:gd name="connsiteX1" fmla="*/ 304799 w 480907"/>
+                <a:gd name="connsiteY1" fmla="*/ 1056640 h 1058620"/>
+                <a:gd name="connsiteX2" fmla="*/ 480907 w 480907"/>
+                <a:gd name="connsiteY2" fmla="*/ 284479 h 1058620"/>
+                <a:gd name="connsiteX3" fmla="*/ 480907 w 480907"/>
+                <a:gd name="connsiteY3" fmla="*/ 284479 h 1058620"/>
+                <a:gd name="connsiteX0" fmla="*/ 0 w 1022774"/>
+                <a:gd name="connsiteY0" fmla="*/ 0 h 1300479"/>
+                <a:gd name="connsiteX1" fmla="*/ 304799 w 1022774"/>
+                <a:gd name="connsiteY1" fmla="*/ 1056640 h 1300479"/>
+                <a:gd name="connsiteX2" fmla="*/ 480907 w 1022774"/>
+                <a:gd name="connsiteY2" fmla="*/ 284479 h 1300479"/>
+                <a:gd name="connsiteX3" fmla="*/ 1022774 w 1022774"/>
+                <a:gd name="connsiteY3" fmla="*/ 1300479 h 1300479"/>
+                <a:gd name="connsiteX0" fmla="*/ 0 w 1022774"/>
+                <a:gd name="connsiteY0" fmla="*/ 0 h 1300479"/>
+                <a:gd name="connsiteX1" fmla="*/ 304799 w 1022774"/>
+                <a:gd name="connsiteY1" fmla="*/ 1056640 h 1300479"/>
+                <a:gd name="connsiteX2" fmla="*/ 697653 w 1022774"/>
+                <a:gd name="connsiteY2" fmla="*/ 1273386 h 1300479"/>
+                <a:gd name="connsiteX3" fmla="*/ 1022774 w 1022774"/>
+                <a:gd name="connsiteY3" fmla="*/ 1300479 h 1300479"/>
+              </a:gdLst>
+              <a:ahLst/>
+              <a:cxnLst>
+                <a:cxn ang="0">
+                  <a:pos x="connsiteX0" y="connsiteY0"/>
+                </a:cxn>
+                <a:cxn ang="0">
+                  <a:pos x="connsiteX1" y="connsiteY1"/>
+                </a:cxn>
+                <a:cxn ang="0">
+                  <a:pos x="connsiteX2" y="connsiteY2"/>
+                </a:cxn>
+                <a:cxn ang="0">
+                  <a:pos x="connsiteX3" y="connsiteY3"/>
+                </a:cxn>
+              </a:cxnLst>
+              <a:rect l="l" t="t" r="r" b="b"/>
+              <a:pathLst>
+                <a:path w="1022774" h="1300479">
+                  <a:moveTo>
+                    <a:pt x="0" y="0"/>
+                  </a:moveTo>
+                  <a:cubicBezTo>
+                    <a:pt x="8466" y="147885"/>
+                    <a:pt x="188524" y="844409"/>
+                    <a:pt x="304799" y="1056640"/>
+                  </a:cubicBezTo>
+                  <a:cubicBezTo>
+                    <a:pt x="421075" y="1268871"/>
+                    <a:pt x="697653" y="1273386"/>
+                    <a:pt x="697653" y="1273386"/>
+                  </a:cubicBezTo>
+                  <a:lnTo>
+                    <a:pt x="1022774" y="1300479"/>
+                  </a:lnTo>
+                </a:path>
+              </a:pathLst>
+            </a:custGeom>
+            <a:noFill/>
+            <a:ln w="25400" cap="flat" cmpd="sng" algn="ctr">
+              <a:solidFill>
+                <a:srgbClr val="0D0D0D"/>
+              </a:solidFill>
+              <a:prstDash val="solid"/>
+              <a:headEnd type="none" w="med" len="med"/>
+              <a:tailEnd type="triangle" w="med" len="med"/>
+            </a:ln>
+            <a:effectLst/>
+          </p:spPr>
+          <p:style>
+            <a:lnRef idx="2">
+              <a:schemeClr val="accent1">
+                <a:shade val="50000"/>
+              </a:schemeClr>
+            </a:lnRef>
+            <a:fillRef idx="1">
+              <a:schemeClr val="accent1"/>
+            </a:fillRef>
+            <a:effectRef idx="0">
+              <a:schemeClr val="accent1"/>
+            </a:effectRef>
+            <a:fontRef idx="minor">
+              <a:schemeClr val="lt1"/>
+            </a:fontRef>
+          </p:style>
+          <p:txBody>
+            <a:bodyPr rtlCol="0" anchor="ctr"/>
+            <a:lstStyle/>
+            <a:p>
+              <a:pPr algn="ctr"/>
+              <a:endParaRPr lang="nl-NL"/>
+            </a:p>
+          </p:txBody>
+        </p:sp>
+        <p:sp>
+          <p:nvSpPr>
+            <p:cNvPr id="37" name="TextBox 36">
+              <a:extLst>
+                <a:ext uri="{FF2B5EF4-FFF2-40B4-BE49-F238E27FC236}">
+                  <a16:creationId xmlns:a16="http://schemas.microsoft.com/office/drawing/2014/main" id="{352995A6-6D6A-62C2-81ED-BFDED936D0AB}"/>
+                </a:ext>
+              </a:extLst>
+            </p:cNvPr>
+            <p:cNvSpPr txBox="1"/>
+            <p:nvPr/>
+          </p:nvSpPr>
+          <p:spPr>
+            <a:xfrm>
+              <a:off x="919336" y="2459675"/>
+              <a:ext cx="704039" cy="230832"/>
+            </a:xfrm>
+            <a:prstGeom prst="rect">
+              <a:avLst/>
+            </a:prstGeom>
+            <a:noFill/>
+          </p:spPr>
+          <p:txBody>
+            <a:bodyPr wrap="none" rtlCol="0">
+              <a:spAutoFit/>
+            </a:bodyPr>
+            <a:lstStyle/>
+            <a:p>
+              <a:r>
+                <a:rPr lang="nl-NL" sz="900" dirty="0"/>
+                <a:t>0 </a:t>
+              </a:r>
+              <a:r>
+                <a:rPr lang="nl-NL" sz="900" dirty="0" err="1"/>
+                <a:t>if</a:t>
+              </a:r>
+              <a:r>
+                <a:rPr lang="nl-NL" sz="900" dirty="0"/>
+                <a:t> =, 1 </a:t>
+              </a:r>
+              <a:r>
+                <a:rPr lang="nl-NL" sz="900" dirty="0" err="1"/>
+                <a:t>if</a:t>
+              </a:r>
+              <a:r>
+                <a:rPr lang="nl-NL" sz="900" dirty="0"/>
+                <a:t> </a:t>
+              </a:r>
+              <a:r>
+                <a:rPr lang="nl-NL" sz="900" dirty="0">
+                  <a:latin typeface="Grotesque" panose="020B0504020202020204" pitchFamily="34" charset="0"/>
+                </a:rPr>
+                <a:t>≠</a:t>
+              </a:r>
+              <a:endParaRPr lang="nl-NL" sz="900" dirty="0"/>
+            </a:p>
+          </p:txBody>
+        </p:sp>
+      </p:grpSp>
+      <p:sp>
+        <p:nvSpPr>
+          <p:cNvPr id="38" name="Freeform: Shape 37">
+            <a:extLst>
+              <a:ext uri="{FF2B5EF4-FFF2-40B4-BE49-F238E27FC236}">
+                <a16:creationId xmlns:a16="http://schemas.microsoft.com/office/drawing/2014/main" id="{087C602B-01F8-05DD-D264-3F22E3C51FEF}"/>
+              </a:ext>
+            </a:extLst>
+          </p:cNvPr>
+          <p:cNvSpPr/>
+          <p:nvPr/>
+        </p:nvSpPr>
+        <p:spPr>
+          <a:xfrm>
+            <a:off x="1492939" y="2031315"/>
+            <a:ext cx="459440" cy="300082"/>
           </a:xfrm>
           <a:custGeom>
             <a:avLst/>
@@ -16095,30 +17266,22 @@
               <a:gd name="connsiteY2" fmla="*/ 284479 h 321644"/>
               <a:gd name="connsiteX3" fmla="*/ 480907 w 480907"/>
               <a:gd name="connsiteY3" fmla="*/ 284479 h 321644"/>
-              <a:gd name="connsiteX0" fmla="*/ 0 w 480907"/>
-              <a:gd name="connsiteY0" fmla="*/ 0 h 1058620"/>
-              <a:gd name="connsiteX1" fmla="*/ 304799 w 480907"/>
-              <a:gd name="connsiteY1" fmla="*/ 1056640 h 1058620"/>
-              <a:gd name="connsiteX2" fmla="*/ 480907 w 480907"/>
-              <a:gd name="connsiteY2" fmla="*/ 284479 h 1058620"/>
-              <a:gd name="connsiteX3" fmla="*/ 480907 w 480907"/>
-              <a:gd name="connsiteY3" fmla="*/ 284479 h 1058620"/>
-              <a:gd name="connsiteX0" fmla="*/ 0 w 1022774"/>
-              <a:gd name="connsiteY0" fmla="*/ 0 h 1300479"/>
-              <a:gd name="connsiteX1" fmla="*/ 304799 w 1022774"/>
-              <a:gd name="connsiteY1" fmla="*/ 1056640 h 1300479"/>
-              <a:gd name="connsiteX2" fmla="*/ 480907 w 1022774"/>
-              <a:gd name="connsiteY2" fmla="*/ 284479 h 1300479"/>
-              <a:gd name="connsiteX3" fmla="*/ 1022774 w 1022774"/>
-              <a:gd name="connsiteY3" fmla="*/ 1300479 h 1300479"/>
-              <a:gd name="connsiteX0" fmla="*/ 0 w 1022774"/>
-              <a:gd name="connsiteY0" fmla="*/ 0 h 1300479"/>
-              <a:gd name="connsiteX1" fmla="*/ 304799 w 1022774"/>
-              <a:gd name="connsiteY1" fmla="*/ 1056640 h 1300479"/>
-              <a:gd name="connsiteX2" fmla="*/ 697653 w 1022774"/>
-              <a:gd name="connsiteY2" fmla="*/ 1273386 h 1300479"/>
-              <a:gd name="connsiteX3" fmla="*/ 1022774 w 1022774"/>
-              <a:gd name="connsiteY3" fmla="*/ 1300479 h 1300479"/>
+              <a:gd name="connsiteX0" fmla="*/ 0 w 501227"/>
+              <a:gd name="connsiteY0" fmla="*/ 0 h 365759"/>
+              <a:gd name="connsiteX1" fmla="*/ 237066 w 501227"/>
+              <a:gd name="connsiteY1" fmla="*/ 304800 h 365759"/>
+              <a:gd name="connsiteX2" fmla="*/ 480907 w 501227"/>
+              <a:gd name="connsiteY2" fmla="*/ 284479 h 365759"/>
+              <a:gd name="connsiteX3" fmla="*/ 501227 w 501227"/>
+              <a:gd name="connsiteY3" fmla="*/ 365759 h 365759"/>
+              <a:gd name="connsiteX0" fmla="*/ 0 w 514774"/>
+              <a:gd name="connsiteY0" fmla="*/ 0 h 365759"/>
+              <a:gd name="connsiteX1" fmla="*/ 237066 w 514774"/>
+              <a:gd name="connsiteY1" fmla="*/ 304800 h 365759"/>
+              <a:gd name="connsiteX2" fmla="*/ 514774 w 514774"/>
+              <a:gd name="connsiteY2" fmla="*/ 358986 h 365759"/>
+              <a:gd name="connsiteX3" fmla="*/ 501227 w 514774"/>
+              <a:gd name="connsiteY3" fmla="*/ 365759 h 365759"/>
             </a:gdLst>
             <a:ahLst/>
             <a:cxnLst>
@@ -16137,22 +17300,22 @@
             </a:cxnLst>
             <a:rect l="l" t="t" r="r" b="b"/>
             <a:pathLst>
-              <a:path w="1022774" h="1300479">
+              <a:path w="514774" h="365759">
                 <a:moveTo>
                   <a:pt x="0" y="0"/>
                 </a:moveTo>
                 <a:cubicBezTo>
                   <a:pt x="8466" y="147885"/>
-                  <a:pt x="188524" y="844409"/>
-                  <a:pt x="304799" y="1056640"/>
+                  <a:pt x="151270" y="244969"/>
+                  <a:pt x="237066" y="304800"/>
                 </a:cubicBezTo>
                 <a:cubicBezTo>
-                  <a:pt x="421075" y="1268871"/>
-                  <a:pt x="697653" y="1273386"/>
-                  <a:pt x="697653" y="1273386"/>
+                  <a:pt x="322862" y="364631"/>
+                  <a:pt x="514774" y="358986"/>
+                  <a:pt x="514774" y="358986"/>
                 </a:cubicBezTo>
                 <a:lnTo>
-                  <a:pt x="1022774" y="1300479"/>
+                  <a:pt x="501227" y="365759"/>
                 </a:lnTo>
               </a:path>
             </a:pathLst>
@@ -16195,411 +17358,10 @@
       </p:sp>
       <p:sp>
         <p:nvSpPr>
-          <p:cNvPr id="23" name="TextBox 22">
-            <a:extLst>
-              <a:ext uri="{FF2B5EF4-FFF2-40B4-BE49-F238E27FC236}">
-                <a16:creationId xmlns:a16="http://schemas.microsoft.com/office/drawing/2014/main" id="{1C85508F-AA38-D277-16B6-895DE582BE35}"/>
-              </a:ext>
-            </a:extLst>
-          </p:cNvPr>
-          <p:cNvSpPr txBox="1"/>
-          <p:nvPr/>
-        </p:nvSpPr>
-        <p:spPr>
-          <a:xfrm>
-            <a:off x="790095" y="2466434"/>
-            <a:ext cx="704039" cy="230832"/>
-          </a:xfrm>
-          <a:prstGeom prst="rect">
-            <a:avLst/>
-          </a:prstGeom>
-          <a:noFill/>
-        </p:spPr>
-        <p:txBody>
-          <a:bodyPr wrap="none" rtlCol="0">
-            <a:spAutoFit/>
-          </a:bodyPr>
-          <a:lstStyle/>
-          <a:p>
-            <a:r>
-              <a:rPr lang="nl-NL" sz="900" dirty="0"/>
-              <a:t>0 </a:t>
-            </a:r>
-            <a:r>
-              <a:rPr lang="nl-NL" sz="900" dirty="0" err="1"/>
-              <a:t>if</a:t>
-            </a:r>
-            <a:r>
-              <a:rPr lang="nl-NL" sz="900" dirty="0"/>
-              <a:t> =, 1 </a:t>
-            </a:r>
-            <a:r>
-              <a:rPr lang="nl-NL" sz="900" dirty="0" err="1"/>
-              <a:t>if</a:t>
-            </a:r>
-            <a:r>
-              <a:rPr lang="nl-NL" sz="900" dirty="0"/>
-              <a:t> </a:t>
-            </a:r>
-            <a:r>
-              <a:rPr lang="nl-NL" sz="900" dirty="0">
-                <a:latin typeface="Grotesque" panose="020B0504020202020204" pitchFamily="34" charset="0"/>
-              </a:rPr>
-              <a:t>≠</a:t>
-            </a:r>
-            <a:endParaRPr lang="nl-NL" sz="900" dirty="0"/>
-          </a:p>
-        </p:txBody>
-      </p:sp>
-      <p:sp>
-        <p:nvSpPr>
-          <p:cNvPr id="24" name="Right Brace 23">
-            <a:extLst>
-              <a:ext uri="{FF2B5EF4-FFF2-40B4-BE49-F238E27FC236}">
-                <a16:creationId xmlns:a16="http://schemas.microsoft.com/office/drawing/2014/main" id="{C1703B1F-D645-D858-4BBC-B486345321FE}"/>
-              </a:ext>
-            </a:extLst>
-          </p:cNvPr>
-          <p:cNvSpPr/>
-          <p:nvPr/>
-        </p:nvSpPr>
-        <p:spPr>
-          <a:xfrm rot="5400000">
-            <a:off x="3085766" y="830876"/>
-            <a:ext cx="155448" cy="914400"/>
-          </a:xfrm>
-          <a:prstGeom prst="rightBrace">
-            <a:avLst/>
-          </a:prstGeom>
-          <a:ln>
-            <a:solidFill>
-              <a:srgbClr val="0D0D0D"/>
-            </a:solidFill>
-          </a:ln>
-        </p:spPr>
-        <p:style>
-          <a:lnRef idx="1">
-            <a:schemeClr val="accent1"/>
-          </a:lnRef>
-          <a:fillRef idx="0">
-            <a:schemeClr val="accent1"/>
-          </a:fillRef>
-          <a:effectRef idx="0">
-            <a:schemeClr val="accent1"/>
-          </a:effectRef>
-          <a:fontRef idx="minor">
-            <a:schemeClr val="tx1"/>
-          </a:fontRef>
-        </p:style>
-        <p:txBody>
-          <a:bodyPr rtlCol="0" anchor="ctr"/>
-          <a:lstStyle/>
-          <a:p>
-            <a:pPr algn="ctr"/>
-            <a:endParaRPr lang="nl-NL"/>
-          </a:p>
-        </p:txBody>
-      </p:sp>
-      <p:sp>
-        <p:nvSpPr>
-          <p:cNvPr id="25" name="Right Brace 24">
-            <a:extLst>
-              <a:ext uri="{FF2B5EF4-FFF2-40B4-BE49-F238E27FC236}">
-                <a16:creationId xmlns:a16="http://schemas.microsoft.com/office/drawing/2014/main" id="{CD4BA000-CD86-C6B1-9843-6F9AE3B41490}"/>
-              </a:ext>
-            </a:extLst>
-          </p:cNvPr>
-          <p:cNvSpPr/>
-          <p:nvPr/>
-        </p:nvSpPr>
-        <p:spPr>
-          <a:xfrm rot="5400000">
-            <a:off x="4589809" y="841454"/>
-            <a:ext cx="155448" cy="914400"/>
-          </a:xfrm>
-          <a:prstGeom prst="rightBrace">
-            <a:avLst/>
-          </a:prstGeom>
-          <a:ln>
-            <a:solidFill>
-              <a:srgbClr val="0D0D0D"/>
-            </a:solidFill>
-          </a:ln>
-        </p:spPr>
-        <p:style>
-          <a:lnRef idx="1">
-            <a:schemeClr val="accent1"/>
-          </a:lnRef>
-          <a:fillRef idx="0">
-            <a:schemeClr val="accent1"/>
-          </a:fillRef>
-          <a:effectRef idx="0">
-            <a:schemeClr val="accent1"/>
-          </a:effectRef>
-          <a:fontRef idx="minor">
-            <a:schemeClr val="tx1"/>
-          </a:fontRef>
-        </p:style>
-        <p:txBody>
-          <a:bodyPr rtlCol="0" anchor="ctr"/>
-          <a:lstStyle/>
-          <a:p>
-            <a:pPr algn="ctr"/>
-            <a:endParaRPr lang="nl-NL"/>
-          </a:p>
-        </p:txBody>
-      </p:sp>
-      <p:sp>
-        <p:nvSpPr>
-          <p:cNvPr id="26" name="Right Brace 25">
-            <a:extLst>
-              <a:ext uri="{FF2B5EF4-FFF2-40B4-BE49-F238E27FC236}">
-                <a16:creationId xmlns:a16="http://schemas.microsoft.com/office/drawing/2014/main" id="{BCC051FC-99DD-28DD-7E6F-FA9865135CAC}"/>
-              </a:ext>
-            </a:extLst>
-          </p:cNvPr>
-          <p:cNvSpPr/>
-          <p:nvPr/>
-        </p:nvSpPr>
-        <p:spPr>
-          <a:xfrm rot="5400000">
-            <a:off x="6102887" y="831436"/>
-            <a:ext cx="155448" cy="914400"/>
-          </a:xfrm>
-          <a:prstGeom prst="rightBrace">
-            <a:avLst/>
-          </a:prstGeom>
-          <a:ln>
-            <a:solidFill>
-              <a:srgbClr val="0D0D0D"/>
-            </a:solidFill>
-          </a:ln>
-        </p:spPr>
-        <p:style>
-          <a:lnRef idx="1">
-            <a:schemeClr val="accent1"/>
-          </a:lnRef>
-          <a:fillRef idx="0">
-            <a:schemeClr val="accent1"/>
-          </a:fillRef>
-          <a:effectRef idx="0">
-            <a:schemeClr val="accent1"/>
-          </a:effectRef>
-          <a:fontRef idx="minor">
-            <a:schemeClr val="tx1"/>
-          </a:fontRef>
-        </p:style>
-        <p:txBody>
-          <a:bodyPr rtlCol="0" anchor="ctr"/>
-          <a:lstStyle/>
-          <a:p>
-            <a:pPr algn="ctr"/>
-            <a:endParaRPr lang="nl-NL"/>
-          </a:p>
-        </p:txBody>
-      </p:sp>
-      <p:sp>
-        <p:nvSpPr>
-          <p:cNvPr id="27" name="Right Brace 26">
-            <a:extLst>
-              <a:ext uri="{FF2B5EF4-FFF2-40B4-BE49-F238E27FC236}">
-                <a16:creationId xmlns:a16="http://schemas.microsoft.com/office/drawing/2014/main" id="{6FA407F0-BBB3-6B24-51E9-2FADD528D71D}"/>
-              </a:ext>
-            </a:extLst>
-          </p:cNvPr>
-          <p:cNvSpPr/>
-          <p:nvPr/>
-        </p:nvSpPr>
-        <p:spPr>
-          <a:xfrm rot="5400000">
-            <a:off x="2900293" y="2263917"/>
-            <a:ext cx="155448" cy="914400"/>
-          </a:xfrm>
-          <a:prstGeom prst="rightBrace">
-            <a:avLst/>
-          </a:prstGeom>
-          <a:ln>
-            <a:solidFill>
-              <a:srgbClr val="0D0D0D"/>
-            </a:solidFill>
-          </a:ln>
-        </p:spPr>
-        <p:style>
-          <a:lnRef idx="1">
-            <a:schemeClr val="accent1"/>
-          </a:lnRef>
-          <a:fillRef idx="0">
-            <a:schemeClr val="accent1"/>
-          </a:fillRef>
-          <a:effectRef idx="0">
-            <a:schemeClr val="accent1"/>
-          </a:effectRef>
-          <a:fontRef idx="minor">
-            <a:schemeClr val="tx1"/>
-          </a:fontRef>
-        </p:style>
-        <p:txBody>
-          <a:bodyPr rtlCol="0" anchor="ctr"/>
-          <a:lstStyle/>
-          <a:p>
-            <a:pPr algn="ctr"/>
-            <a:endParaRPr lang="nl-NL"/>
-          </a:p>
-        </p:txBody>
-      </p:sp>
-      <p:sp>
-        <p:nvSpPr>
-          <p:cNvPr id="28" name="Right Brace 27">
-            <a:extLst>
-              <a:ext uri="{FF2B5EF4-FFF2-40B4-BE49-F238E27FC236}">
-                <a16:creationId xmlns:a16="http://schemas.microsoft.com/office/drawing/2014/main" id="{F0237666-3ECC-D1E7-73E7-E1547790912B}"/>
-              </a:ext>
-            </a:extLst>
-          </p:cNvPr>
-          <p:cNvSpPr/>
-          <p:nvPr/>
-        </p:nvSpPr>
-        <p:spPr>
-          <a:xfrm rot="5400000">
-            <a:off x="4743633" y="2289346"/>
-            <a:ext cx="155448" cy="914400"/>
-          </a:xfrm>
-          <a:prstGeom prst="rightBrace">
-            <a:avLst/>
-          </a:prstGeom>
-          <a:ln>
-            <a:solidFill>
-              <a:srgbClr val="0D0D0D"/>
-            </a:solidFill>
-          </a:ln>
-        </p:spPr>
-        <p:style>
-          <a:lnRef idx="1">
-            <a:schemeClr val="accent1"/>
-          </a:lnRef>
-          <a:fillRef idx="0">
-            <a:schemeClr val="accent1"/>
-          </a:fillRef>
-          <a:effectRef idx="0">
-            <a:schemeClr val="accent1"/>
-          </a:effectRef>
-          <a:fontRef idx="minor">
-            <a:schemeClr val="tx1"/>
-          </a:fontRef>
-        </p:style>
-        <p:txBody>
-          <a:bodyPr rtlCol="0" anchor="ctr"/>
-          <a:lstStyle/>
-          <a:p>
-            <a:pPr algn="ctr"/>
-            <a:endParaRPr lang="nl-NL"/>
-          </a:p>
-        </p:txBody>
-      </p:sp>
-      <p:sp>
-        <p:nvSpPr>
-          <p:cNvPr id="29" name="Right Brace 28">
-            <a:extLst>
-              <a:ext uri="{FF2B5EF4-FFF2-40B4-BE49-F238E27FC236}">
-                <a16:creationId xmlns:a16="http://schemas.microsoft.com/office/drawing/2014/main" id="{54330084-CB8E-CF14-4ECF-2D17E6033645}"/>
-              </a:ext>
-            </a:extLst>
-          </p:cNvPr>
-          <p:cNvSpPr/>
-          <p:nvPr/>
-        </p:nvSpPr>
-        <p:spPr>
-          <a:xfrm rot="5400000">
-            <a:off x="3803937" y="3557128"/>
-            <a:ext cx="155448" cy="914400"/>
-          </a:xfrm>
-          <a:prstGeom prst="rightBrace">
-            <a:avLst/>
-          </a:prstGeom>
-          <a:ln>
-            <a:solidFill>
-              <a:srgbClr val="0D0D0D"/>
-            </a:solidFill>
-          </a:ln>
-        </p:spPr>
-        <p:style>
-          <a:lnRef idx="1">
-            <a:schemeClr val="accent1"/>
-          </a:lnRef>
-          <a:fillRef idx="0">
-            <a:schemeClr val="accent1"/>
-          </a:fillRef>
-          <a:effectRef idx="0">
-            <a:schemeClr val="accent1"/>
-          </a:effectRef>
-          <a:fontRef idx="minor">
-            <a:schemeClr val="tx1"/>
-          </a:fontRef>
-        </p:style>
-        <p:txBody>
-          <a:bodyPr rtlCol="0" anchor="ctr"/>
-          <a:lstStyle/>
-          <a:p>
-            <a:pPr algn="ctr"/>
-            <a:endParaRPr lang="nl-NL"/>
-          </a:p>
-        </p:txBody>
-      </p:sp>
-      <p:sp>
-        <p:nvSpPr>
-          <p:cNvPr id="30" name="Right Brace 29">
-            <a:extLst>
-              <a:ext uri="{FF2B5EF4-FFF2-40B4-BE49-F238E27FC236}">
-                <a16:creationId xmlns:a16="http://schemas.microsoft.com/office/drawing/2014/main" id="{0DFCF1C3-CFA1-F519-0118-20028465B17C}"/>
-              </a:ext>
-            </a:extLst>
-          </p:cNvPr>
-          <p:cNvSpPr/>
-          <p:nvPr/>
-        </p:nvSpPr>
-        <p:spPr>
-          <a:xfrm rot="5400000">
-            <a:off x="1509569" y="840679"/>
-            <a:ext cx="155448" cy="914400"/>
-          </a:xfrm>
-          <a:prstGeom prst="rightBrace">
-            <a:avLst/>
-          </a:prstGeom>
-          <a:ln>
-            <a:solidFill>
-              <a:srgbClr val="0D0D0D"/>
-            </a:solidFill>
-          </a:ln>
-        </p:spPr>
-        <p:style>
-          <a:lnRef idx="1">
-            <a:schemeClr val="accent1"/>
-          </a:lnRef>
-          <a:fillRef idx="0">
-            <a:schemeClr val="accent1"/>
-          </a:fillRef>
-          <a:effectRef idx="0">
-            <a:schemeClr val="accent1"/>
-          </a:effectRef>
-          <a:fontRef idx="minor">
-            <a:schemeClr val="tx1"/>
-          </a:fontRef>
-        </p:style>
-        <p:txBody>
-          <a:bodyPr rtlCol="0" anchor="ctr"/>
-          <a:lstStyle/>
-          <a:p>
-            <a:pPr algn="ctr"/>
-            <a:endParaRPr lang="nl-NL"/>
-          </a:p>
-        </p:txBody>
-      </p:sp>
-      <p:sp>
-        <p:nvSpPr>
-          <p:cNvPr id="31" name="Arrow: Right 30">
-            <a:extLst>
-              <a:ext uri="{FF2B5EF4-FFF2-40B4-BE49-F238E27FC236}">
-                <a16:creationId xmlns:a16="http://schemas.microsoft.com/office/drawing/2014/main" id="{BF6C70CC-FDC6-F4B8-1320-B5C731305C62}"/>
+          <p:cNvPr id="39" name="Freeform: Shape 38">
+            <a:extLst>
+              <a:ext uri="{FF2B5EF4-FFF2-40B4-BE49-F238E27FC236}">
+                <a16:creationId xmlns:a16="http://schemas.microsoft.com/office/drawing/2014/main" id="{01BB3F7D-3A25-2467-CEA7-B599F97BCE51}"/>
               </a:ext>
             </a:extLst>
           </p:cNvPr>
@@ -16608,20 +17370,122 @@
         </p:nvSpPr>
         <p:spPr>
           <a:xfrm>
-            <a:off x="4572000" y="4551825"/>
-            <a:ext cx="978408" cy="484632"/>
-          </a:xfrm>
-          <a:prstGeom prst="rightArrow">
-            <a:avLst/>
-          </a:prstGeom>
-          <a:solidFill>
-            <a:srgbClr val="0089C4"/>
-          </a:solidFill>
+            <a:off x="3428108" y="4519877"/>
+            <a:ext cx="166266" cy="337504"/>
+          </a:xfrm>
+          <a:custGeom>
+            <a:avLst/>
+            <a:gdLst>
+              <a:gd name="connsiteX0" fmla="*/ 0 w 629920"/>
+              <a:gd name="connsiteY0" fmla="*/ 0 h 298041"/>
+              <a:gd name="connsiteX1" fmla="*/ 270933 w 629920"/>
+              <a:gd name="connsiteY1" fmla="*/ 250613 h 298041"/>
+              <a:gd name="connsiteX2" fmla="*/ 629920 w 629920"/>
+              <a:gd name="connsiteY2" fmla="*/ 298026 h 298041"/>
+              <a:gd name="connsiteX3" fmla="*/ 629920 w 629920"/>
+              <a:gd name="connsiteY3" fmla="*/ 298026 h 298041"/>
+              <a:gd name="connsiteX0" fmla="*/ 0 w 399626"/>
+              <a:gd name="connsiteY0" fmla="*/ 0 h 264159"/>
+              <a:gd name="connsiteX1" fmla="*/ 40639 w 399626"/>
+              <a:gd name="connsiteY1" fmla="*/ 216746 h 264159"/>
+              <a:gd name="connsiteX2" fmla="*/ 399626 w 399626"/>
+              <a:gd name="connsiteY2" fmla="*/ 264159 h 264159"/>
+              <a:gd name="connsiteX3" fmla="*/ 399626 w 399626"/>
+              <a:gd name="connsiteY3" fmla="*/ 264159 h 264159"/>
+              <a:gd name="connsiteX0" fmla="*/ 0 w 399626"/>
+              <a:gd name="connsiteY0" fmla="*/ 0 h 299883"/>
+              <a:gd name="connsiteX1" fmla="*/ 155785 w 399626"/>
+              <a:gd name="connsiteY1" fmla="*/ 284480 h 299883"/>
+              <a:gd name="connsiteX2" fmla="*/ 399626 w 399626"/>
+              <a:gd name="connsiteY2" fmla="*/ 264159 h 299883"/>
+              <a:gd name="connsiteX3" fmla="*/ 399626 w 399626"/>
+              <a:gd name="connsiteY3" fmla="*/ 264159 h 299883"/>
+              <a:gd name="connsiteX0" fmla="*/ 0 w 487680"/>
+              <a:gd name="connsiteY0" fmla="*/ 0 h 292630"/>
+              <a:gd name="connsiteX1" fmla="*/ 243839 w 487680"/>
+              <a:gd name="connsiteY1" fmla="*/ 277706 h 292630"/>
+              <a:gd name="connsiteX2" fmla="*/ 487680 w 487680"/>
+              <a:gd name="connsiteY2" fmla="*/ 257385 h 292630"/>
+              <a:gd name="connsiteX3" fmla="*/ 487680 w 487680"/>
+              <a:gd name="connsiteY3" fmla="*/ 257385 h 292630"/>
+              <a:gd name="connsiteX0" fmla="*/ 0 w 487680"/>
+              <a:gd name="connsiteY0" fmla="*/ 0 h 292630"/>
+              <a:gd name="connsiteX1" fmla="*/ 243839 w 487680"/>
+              <a:gd name="connsiteY1" fmla="*/ 277706 h 292630"/>
+              <a:gd name="connsiteX2" fmla="*/ 487680 w 487680"/>
+              <a:gd name="connsiteY2" fmla="*/ 257385 h 292630"/>
+              <a:gd name="connsiteX3" fmla="*/ 487680 w 487680"/>
+              <a:gd name="connsiteY3" fmla="*/ 257385 h 292630"/>
+              <a:gd name="connsiteX0" fmla="*/ 0 w 480907"/>
+              <a:gd name="connsiteY0" fmla="*/ 0 h 321644"/>
+              <a:gd name="connsiteX1" fmla="*/ 237066 w 480907"/>
+              <a:gd name="connsiteY1" fmla="*/ 304800 h 321644"/>
+              <a:gd name="connsiteX2" fmla="*/ 480907 w 480907"/>
+              <a:gd name="connsiteY2" fmla="*/ 284479 h 321644"/>
+              <a:gd name="connsiteX3" fmla="*/ 480907 w 480907"/>
+              <a:gd name="connsiteY3" fmla="*/ 284479 h 321644"/>
+              <a:gd name="connsiteX0" fmla="*/ 0 w 501227"/>
+              <a:gd name="connsiteY0" fmla="*/ 0 h 365759"/>
+              <a:gd name="connsiteX1" fmla="*/ 237066 w 501227"/>
+              <a:gd name="connsiteY1" fmla="*/ 304800 h 365759"/>
+              <a:gd name="connsiteX2" fmla="*/ 480907 w 501227"/>
+              <a:gd name="connsiteY2" fmla="*/ 284479 h 365759"/>
+              <a:gd name="connsiteX3" fmla="*/ 501227 w 501227"/>
+              <a:gd name="connsiteY3" fmla="*/ 365759 h 365759"/>
+              <a:gd name="connsiteX0" fmla="*/ 0 w 514774"/>
+              <a:gd name="connsiteY0" fmla="*/ 0 h 365759"/>
+              <a:gd name="connsiteX1" fmla="*/ 237066 w 514774"/>
+              <a:gd name="connsiteY1" fmla="*/ 304800 h 365759"/>
+              <a:gd name="connsiteX2" fmla="*/ 514774 w 514774"/>
+              <a:gd name="connsiteY2" fmla="*/ 358986 h 365759"/>
+              <a:gd name="connsiteX3" fmla="*/ 501227 w 514774"/>
+              <a:gd name="connsiteY3" fmla="*/ 365759 h 365759"/>
+            </a:gdLst>
+            <a:ahLst/>
+            <a:cxnLst>
+              <a:cxn ang="0">
+                <a:pos x="connsiteX0" y="connsiteY0"/>
+              </a:cxn>
+              <a:cxn ang="0">
+                <a:pos x="connsiteX1" y="connsiteY1"/>
+              </a:cxn>
+              <a:cxn ang="0">
+                <a:pos x="connsiteX2" y="connsiteY2"/>
+              </a:cxn>
+              <a:cxn ang="0">
+                <a:pos x="connsiteX3" y="connsiteY3"/>
+              </a:cxn>
+            </a:cxnLst>
+            <a:rect l="l" t="t" r="r" b="b"/>
+            <a:pathLst>
+              <a:path w="514774" h="365759">
+                <a:moveTo>
+                  <a:pt x="0" y="0"/>
+                </a:moveTo>
+                <a:cubicBezTo>
+                  <a:pt x="8466" y="147885"/>
+                  <a:pt x="151270" y="244969"/>
+                  <a:pt x="237066" y="304800"/>
+                </a:cubicBezTo>
+                <a:cubicBezTo>
+                  <a:pt x="322862" y="364631"/>
+                  <a:pt x="514774" y="358986"/>
+                  <a:pt x="514774" y="358986"/>
+                </a:cubicBezTo>
+                <a:lnTo>
+                  <a:pt x="501227" y="365759"/>
+                </a:lnTo>
+              </a:path>
+            </a:pathLst>
+          </a:custGeom>
+          <a:noFill/>
           <a:ln w="25400" cap="flat" cmpd="sng" algn="ctr">
             <a:solidFill>
-              <a:srgbClr val="0089C4"/>
+              <a:srgbClr val="0D0D0D"/>
             </a:solidFill>
             <a:prstDash val="solid"/>
+            <a:headEnd type="none" w="med" len="med"/>
+            <a:tailEnd type="triangle" w="med" len="med"/>
           </a:ln>
           <a:effectLst/>
         </p:spPr>
@@ -16650,148 +17514,314 @@
           </a:p>
         </p:txBody>
       </p:sp>
-      <p:sp>
-        <p:nvSpPr>
-          <p:cNvPr id="32" name="TextBox 31">
-            <a:extLst>
-              <a:ext uri="{FF2B5EF4-FFF2-40B4-BE49-F238E27FC236}">
-                <a16:creationId xmlns:a16="http://schemas.microsoft.com/office/drawing/2014/main" id="{96EF3AB2-3889-AD39-26A4-C1D798052A20}"/>
-              </a:ext>
-            </a:extLst>
-          </p:cNvPr>
-          <p:cNvSpPr txBox="1"/>
+      <p:grpSp>
+        <p:nvGrpSpPr>
+          <p:cNvPr id="40" name="Group 39">
+            <a:extLst>
+              <a:ext uri="{FF2B5EF4-FFF2-40B4-BE49-F238E27FC236}">
+                <a16:creationId xmlns:a16="http://schemas.microsoft.com/office/drawing/2014/main" id="{688DDA48-991F-2C38-5894-E39DBC333761}"/>
+              </a:ext>
+            </a:extLst>
+          </p:cNvPr>
+          <p:cNvGrpSpPr/>
           <p:nvPr/>
-        </p:nvSpPr>
-        <p:spPr>
+        </p:nvGrpSpPr>
+        <p:grpSpPr>
           <a:xfrm>
-            <a:off x="7579422" y="390928"/>
-            <a:ext cx="1388943" cy="369332"/>
-          </a:xfrm>
-          <a:prstGeom prst="rect">
-            <a:avLst/>
-          </a:prstGeom>
-          <a:noFill/>
-        </p:spPr>
-        <p:txBody>
-          <a:bodyPr wrap="square" rtlCol="0">
-            <a:spAutoFit/>
-          </a:bodyPr>
-          <a:lstStyle/>
-          <a:p>
-            <a:r>
-              <a:rPr lang="nl-NL"/>
-              <a:t>Original bits</a:t>
-            </a:r>
-          </a:p>
-        </p:txBody>
-      </p:sp>
-      <p:sp>
-        <p:nvSpPr>
-          <p:cNvPr id="33" name="TextBox 32">
-            <a:extLst>
-              <a:ext uri="{FF2B5EF4-FFF2-40B4-BE49-F238E27FC236}">
-                <a16:creationId xmlns:a16="http://schemas.microsoft.com/office/drawing/2014/main" id="{D7EB9410-D872-BD0E-2B87-6A1E468C015D}"/>
-              </a:ext>
-            </a:extLst>
-          </p:cNvPr>
-          <p:cNvSpPr txBox="1"/>
-          <p:nvPr/>
-        </p:nvSpPr>
-        <p:spPr>
-          <a:xfrm>
-            <a:off x="5660708" y="4444096"/>
-            <a:ext cx="3027680" cy="507831"/>
-          </a:xfrm>
-          <a:prstGeom prst="rect">
-            <a:avLst/>
-          </a:prstGeom>
-          <a:noFill/>
-        </p:spPr>
-        <p:txBody>
-          <a:bodyPr wrap="square" rtlCol="0">
-            <a:spAutoFit/>
-          </a:bodyPr>
-          <a:lstStyle/>
-          <a:p>
-            <a:r>
-              <a:rPr lang="nl-NL" dirty="0"/>
-              <a:t>Output of last box is </a:t>
-            </a:r>
-            <a:r>
-              <a:rPr lang="nl-NL" dirty="0" err="1"/>
-              <a:t>communicated</a:t>
-            </a:r>
-            <a:r>
-              <a:rPr lang="nl-NL" dirty="0"/>
-              <a:t> </a:t>
-            </a:r>
-            <a:r>
-              <a:rPr lang="nl-NL" dirty="0" err="1"/>
-              <a:t>to</a:t>
-            </a:r>
-            <a:r>
-              <a:rPr lang="nl-NL" dirty="0"/>
-              <a:t> Bob</a:t>
-            </a:r>
-          </a:p>
-        </p:txBody>
-      </p:sp>
-      <p:sp>
-        <p:nvSpPr>
-          <p:cNvPr id="34" name="Arrow: Right 33">
-            <a:extLst>
-              <a:ext uri="{FF2B5EF4-FFF2-40B4-BE49-F238E27FC236}">
-                <a16:creationId xmlns:a16="http://schemas.microsoft.com/office/drawing/2014/main" id="{66DAC1B2-4240-9630-7676-3FFA41A094B2}"/>
-              </a:ext>
-            </a:extLst>
-          </p:cNvPr>
-          <p:cNvSpPr/>
-          <p:nvPr/>
-        </p:nvSpPr>
-        <p:spPr>
-          <a:xfrm rot="10800000">
-            <a:off x="7090218" y="744406"/>
-            <a:ext cx="978408" cy="484632"/>
-          </a:xfrm>
-          <a:prstGeom prst="rightArrow">
-            <a:avLst/>
-          </a:prstGeom>
-          <a:solidFill>
-            <a:srgbClr val="0089C4"/>
-          </a:solidFill>
-          <a:ln w="25400" cap="flat" cmpd="sng" algn="ctr">
-            <a:solidFill>
-              <a:srgbClr val="0089C4"/>
-            </a:solidFill>
-            <a:prstDash val="solid"/>
-          </a:ln>
-          <a:effectLst/>
-        </p:spPr>
-        <p:style>
-          <a:lnRef idx="2">
-            <a:schemeClr val="accent1">
-              <a:shade val="50000"/>
-            </a:schemeClr>
-          </a:lnRef>
-          <a:fillRef idx="1">
-            <a:schemeClr val="accent1"/>
-          </a:fillRef>
-          <a:effectRef idx="0">
-            <a:schemeClr val="accent1"/>
-          </a:effectRef>
-          <a:fontRef idx="minor">
-            <a:schemeClr val="lt1"/>
-          </a:fontRef>
-        </p:style>
-        <p:txBody>
-          <a:bodyPr rtlCol="0" anchor="ctr"/>
-          <a:lstStyle/>
-          <a:p>
-            <a:pPr algn="ctr"/>
-            <a:endParaRPr lang="nl-NL"/>
-          </a:p>
-        </p:txBody>
-      </p:sp>
+            <a:off x="2730570" y="3862123"/>
+            <a:ext cx="863275" cy="1210910"/>
+            <a:chOff x="919336" y="1443925"/>
+            <a:chExt cx="1021875" cy="1246582"/>
+          </a:xfrm>
+        </p:grpSpPr>
+        <p:sp>
+          <p:nvSpPr>
+            <p:cNvPr id="41" name="Freeform: Shape 40">
+              <a:extLst>
+                <a:ext uri="{FF2B5EF4-FFF2-40B4-BE49-F238E27FC236}">
+                  <a16:creationId xmlns:a16="http://schemas.microsoft.com/office/drawing/2014/main" id="{7AFE55BB-4F0F-530C-90E7-87E49FA71924}"/>
+                </a:ext>
+              </a:extLst>
+            </p:cNvPr>
+            <p:cNvSpPr/>
+            <p:nvPr/>
+          </p:nvSpPr>
+          <p:spPr>
+            <a:xfrm>
+              <a:off x="1305540" y="1443925"/>
+              <a:ext cx="635671" cy="1113583"/>
+            </a:xfrm>
+            <a:custGeom>
+              <a:avLst/>
+              <a:gdLst>
+                <a:gd name="connsiteX0" fmla="*/ 0 w 629920"/>
+                <a:gd name="connsiteY0" fmla="*/ 0 h 298041"/>
+                <a:gd name="connsiteX1" fmla="*/ 270933 w 629920"/>
+                <a:gd name="connsiteY1" fmla="*/ 250613 h 298041"/>
+                <a:gd name="connsiteX2" fmla="*/ 629920 w 629920"/>
+                <a:gd name="connsiteY2" fmla="*/ 298026 h 298041"/>
+                <a:gd name="connsiteX3" fmla="*/ 629920 w 629920"/>
+                <a:gd name="connsiteY3" fmla="*/ 298026 h 298041"/>
+                <a:gd name="connsiteX0" fmla="*/ 0 w 399626"/>
+                <a:gd name="connsiteY0" fmla="*/ 0 h 264159"/>
+                <a:gd name="connsiteX1" fmla="*/ 40639 w 399626"/>
+                <a:gd name="connsiteY1" fmla="*/ 216746 h 264159"/>
+                <a:gd name="connsiteX2" fmla="*/ 399626 w 399626"/>
+                <a:gd name="connsiteY2" fmla="*/ 264159 h 264159"/>
+                <a:gd name="connsiteX3" fmla="*/ 399626 w 399626"/>
+                <a:gd name="connsiteY3" fmla="*/ 264159 h 264159"/>
+                <a:gd name="connsiteX0" fmla="*/ 0 w 399626"/>
+                <a:gd name="connsiteY0" fmla="*/ 0 h 299883"/>
+                <a:gd name="connsiteX1" fmla="*/ 155785 w 399626"/>
+                <a:gd name="connsiteY1" fmla="*/ 284480 h 299883"/>
+                <a:gd name="connsiteX2" fmla="*/ 399626 w 399626"/>
+                <a:gd name="connsiteY2" fmla="*/ 264159 h 299883"/>
+                <a:gd name="connsiteX3" fmla="*/ 399626 w 399626"/>
+                <a:gd name="connsiteY3" fmla="*/ 264159 h 299883"/>
+                <a:gd name="connsiteX0" fmla="*/ 0 w 487680"/>
+                <a:gd name="connsiteY0" fmla="*/ 0 h 292630"/>
+                <a:gd name="connsiteX1" fmla="*/ 243839 w 487680"/>
+                <a:gd name="connsiteY1" fmla="*/ 277706 h 292630"/>
+                <a:gd name="connsiteX2" fmla="*/ 487680 w 487680"/>
+                <a:gd name="connsiteY2" fmla="*/ 257385 h 292630"/>
+                <a:gd name="connsiteX3" fmla="*/ 487680 w 487680"/>
+                <a:gd name="connsiteY3" fmla="*/ 257385 h 292630"/>
+                <a:gd name="connsiteX0" fmla="*/ 0 w 487680"/>
+                <a:gd name="connsiteY0" fmla="*/ 0 h 292630"/>
+                <a:gd name="connsiteX1" fmla="*/ 243839 w 487680"/>
+                <a:gd name="connsiteY1" fmla="*/ 277706 h 292630"/>
+                <a:gd name="connsiteX2" fmla="*/ 487680 w 487680"/>
+                <a:gd name="connsiteY2" fmla="*/ 257385 h 292630"/>
+                <a:gd name="connsiteX3" fmla="*/ 487680 w 487680"/>
+                <a:gd name="connsiteY3" fmla="*/ 257385 h 292630"/>
+                <a:gd name="connsiteX0" fmla="*/ 0 w 480907"/>
+                <a:gd name="connsiteY0" fmla="*/ 0 h 321644"/>
+                <a:gd name="connsiteX1" fmla="*/ 237066 w 480907"/>
+                <a:gd name="connsiteY1" fmla="*/ 304800 h 321644"/>
+                <a:gd name="connsiteX2" fmla="*/ 480907 w 480907"/>
+                <a:gd name="connsiteY2" fmla="*/ 284479 h 321644"/>
+                <a:gd name="connsiteX3" fmla="*/ 480907 w 480907"/>
+                <a:gd name="connsiteY3" fmla="*/ 284479 h 321644"/>
+                <a:gd name="connsiteX0" fmla="*/ 0 w 480907"/>
+                <a:gd name="connsiteY0" fmla="*/ 0 h 1058620"/>
+                <a:gd name="connsiteX1" fmla="*/ 304799 w 480907"/>
+                <a:gd name="connsiteY1" fmla="*/ 1056640 h 1058620"/>
+                <a:gd name="connsiteX2" fmla="*/ 480907 w 480907"/>
+                <a:gd name="connsiteY2" fmla="*/ 284479 h 1058620"/>
+                <a:gd name="connsiteX3" fmla="*/ 480907 w 480907"/>
+                <a:gd name="connsiteY3" fmla="*/ 284479 h 1058620"/>
+                <a:gd name="connsiteX0" fmla="*/ 0 w 1022774"/>
+                <a:gd name="connsiteY0" fmla="*/ 0 h 1300479"/>
+                <a:gd name="connsiteX1" fmla="*/ 304799 w 1022774"/>
+                <a:gd name="connsiteY1" fmla="*/ 1056640 h 1300479"/>
+                <a:gd name="connsiteX2" fmla="*/ 480907 w 1022774"/>
+                <a:gd name="connsiteY2" fmla="*/ 284479 h 1300479"/>
+                <a:gd name="connsiteX3" fmla="*/ 1022774 w 1022774"/>
+                <a:gd name="connsiteY3" fmla="*/ 1300479 h 1300479"/>
+                <a:gd name="connsiteX0" fmla="*/ 0 w 1022774"/>
+                <a:gd name="connsiteY0" fmla="*/ 0 h 1300479"/>
+                <a:gd name="connsiteX1" fmla="*/ 304799 w 1022774"/>
+                <a:gd name="connsiteY1" fmla="*/ 1056640 h 1300479"/>
+                <a:gd name="connsiteX2" fmla="*/ 697653 w 1022774"/>
+                <a:gd name="connsiteY2" fmla="*/ 1273386 h 1300479"/>
+                <a:gd name="connsiteX3" fmla="*/ 1022774 w 1022774"/>
+                <a:gd name="connsiteY3" fmla="*/ 1300479 h 1300479"/>
+              </a:gdLst>
+              <a:ahLst/>
+              <a:cxnLst>
+                <a:cxn ang="0">
+                  <a:pos x="connsiteX0" y="connsiteY0"/>
+                </a:cxn>
+                <a:cxn ang="0">
+                  <a:pos x="connsiteX1" y="connsiteY1"/>
+                </a:cxn>
+                <a:cxn ang="0">
+                  <a:pos x="connsiteX2" y="connsiteY2"/>
+                </a:cxn>
+                <a:cxn ang="0">
+                  <a:pos x="connsiteX3" y="connsiteY3"/>
+                </a:cxn>
+              </a:cxnLst>
+              <a:rect l="l" t="t" r="r" b="b"/>
+              <a:pathLst>
+                <a:path w="1022774" h="1300479">
+                  <a:moveTo>
+                    <a:pt x="0" y="0"/>
+                  </a:moveTo>
+                  <a:cubicBezTo>
+                    <a:pt x="8466" y="147885"/>
+                    <a:pt x="188524" y="844409"/>
+                    <a:pt x="304799" y="1056640"/>
+                  </a:cubicBezTo>
+                  <a:cubicBezTo>
+                    <a:pt x="421075" y="1268871"/>
+                    <a:pt x="697653" y="1273386"/>
+                    <a:pt x="697653" y="1273386"/>
+                  </a:cubicBezTo>
+                  <a:lnTo>
+                    <a:pt x="1022774" y="1300479"/>
+                  </a:lnTo>
+                </a:path>
+              </a:pathLst>
+            </a:custGeom>
+            <a:noFill/>
+            <a:ln w="25400" cap="flat" cmpd="sng" algn="ctr">
+              <a:solidFill>
+                <a:srgbClr val="0D0D0D"/>
+              </a:solidFill>
+              <a:prstDash val="solid"/>
+              <a:headEnd type="none" w="med" len="med"/>
+              <a:tailEnd type="triangle" w="med" len="med"/>
+            </a:ln>
+            <a:effectLst/>
+          </p:spPr>
+          <p:style>
+            <a:lnRef idx="2">
+              <a:schemeClr val="accent1">
+                <a:shade val="50000"/>
+              </a:schemeClr>
+            </a:lnRef>
+            <a:fillRef idx="1">
+              <a:schemeClr val="accent1"/>
+            </a:fillRef>
+            <a:effectRef idx="0">
+              <a:schemeClr val="accent1"/>
+            </a:effectRef>
+            <a:fontRef idx="minor">
+              <a:schemeClr val="lt1"/>
+            </a:fontRef>
+          </p:style>
+          <p:txBody>
+            <a:bodyPr rtlCol="0" anchor="ctr"/>
+            <a:lstStyle/>
+            <a:p>
+              <a:pPr algn="ctr"/>
+              <a:endParaRPr lang="nl-NL"/>
+            </a:p>
+          </p:txBody>
+        </p:sp>
+        <p:sp>
+          <p:nvSpPr>
+            <p:cNvPr id="42" name="TextBox 41">
+              <a:extLst>
+                <a:ext uri="{FF2B5EF4-FFF2-40B4-BE49-F238E27FC236}">
+                  <a16:creationId xmlns:a16="http://schemas.microsoft.com/office/drawing/2014/main" id="{5551D40E-F93D-6855-E2C9-FE71E7FC719C}"/>
+                </a:ext>
+              </a:extLst>
+            </p:cNvPr>
+            <p:cNvSpPr txBox="1"/>
+            <p:nvPr/>
+          </p:nvSpPr>
+          <p:spPr>
+            <a:xfrm>
+              <a:off x="919336" y="2459675"/>
+              <a:ext cx="704039" cy="230832"/>
+            </a:xfrm>
+            <a:prstGeom prst="rect">
+              <a:avLst/>
+            </a:prstGeom>
+            <a:noFill/>
+          </p:spPr>
+          <p:txBody>
+            <a:bodyPr wrap="none" rtlCol="0">
+              <a:spAutoFit/>
+            </a:bodyPr>
+            <a:lstStyle/>
+            <a:p>
+              <a:r>
+                <a:rPr lang="nl-NL" sz="900" dirty="0"/>
+                <a:t>0 </a:t>
+              </a:r>
+              <a:r>
+                <a:rPr lang="nl-NL" sz="900" dirty="0" err="1"/>
+                <a:t>if</a:t>
+              </a:r>
+              <a:r>
+                <a:rPr lang="nl-NL" sz="900" dirty="0"/>
+                <a:t> =, 1 </a:t>
+              </a:r>
+              <a:r>
+                <a:rPr lang="nl-NL" sz="900" dirty="0" err="1"/>
+                <a:t>if</a:t>
+              </a:r>
+              <a:r>
+                <a:rPr lang="nl-NL" sz="900" dirty="0"/>
+                <a:t> </a:t>
+              </a:r>
+              <a:r>
+                <a:rPr lang="nl-NL" sz="900" dirty="0">
+                  <a:latin typeface="Grotesque" panose="020B0504020202020204" pitchFamily="34" charset="0"/>
+                </a:rPr>
+                <a:t>≠</a:t>
+              </a:r>
+              <a:endParaRPr lang="nl-NL" sz="900" dirty="0"/>
+            </a:p>
+          </p:txBody>
+        </p:sp>
+      </p:grpSp>
+      <p:graphicFrame>
+        <p:nvGraphicFramePr>
+          <p:cNvPr id="43" name="Table 42">
+            <a:extLst>
+              <a:ext uri="{FF2B5EF4-FFF2-40B4-BE49-F238E27FC236}">
+                <a16:creationId xmlns:a16="http://schemas.microsoft.com/office/drawing/2014/main" id="{504648DE-D8EE-48E1-75A0-937E8E5B1D39}"/>
+              </a:ext>
+            </a:extLst>
+          </p:cNvPr>
+          <p:cNvGraphicFramePr>
+            <a:graphicFrameLocks noGrp="1"/>
+          </p:cNvGraphicFramePr>
+          <p:nvPr>
+            <p:extLst>
+              <p:ext uri="{D42A27DB-BD31-4B8C-83A1-F6EECF244321}">
+                <p14:modId xmlns:p14="http://schemas.microsoft.com/office/powerpoint/2010/main" val="3831816569"/>
+              </p:ext>
+            </p:extLst>
+          </p:nvPr>
+        </p:nvGraphicFramePr>
+        <p:xfrm>
+          <a:off x="3638971" y="4707273"/>
+          <a:ext cx="915247" cy="365760"/>
+        </p:xfrm>
+        <a:graphic>
+          <a:graphicData uri="http://schemas.openxmlformats.org/drawingml/2006/table">
+            <a:tbl>
+              <a:tblPr firstRow="1" bandRow="1">
+                <a:tableStyleId>{5940675A-B579-460E-94D1-54222C63F5DA}</a:tableStyleId>
+              </a:tblPr>
+              <a:tblGrid>
+                <a:gridCol w="915247">
+                  <a:extLst>
+                    <a:ext uri="{9D8B030D-6E8A-4147-A177-3AD203B41FA5}">
+                      <a16:colId xmlns:a16="http://schemas.microsoft.com/office/drawing/2014/main" val="107621365"/>
+                    </a:ext>
+                  </a:extLst>
+                </a:gridCol>
+              </a:tblGrid>
+              <a:tr h="362511">
+                <a:tc>
+                  <a:txBody>
+                    <a:bodyPr/>
+                    <a:lstStyle/>
+                    <a:p>
+                      <a:r>
+                        <a:rPr lang="nl-NL" dirty="0"/>
+                        <a:t>1</a:t>
+                      </a:r>
+                    </a:p>
+                  </a:txBody>
+                  <a:tcPr/>
+                </a:tc>
+                <a:extLst>
+                  <a:ext uri="{0D108BD9-81ED-4DB2-BD59-A6C34878D82A}">
+                    <a16:rowId xmlns:a16="http://schemas.microsoft.com/office/drawing/2014/main" val="3074209416"/>
+                  </a:ext>
+                </a:extLst>
+              </a:tr>
+            </a:tbl>
+          </a:graphicData>
+        </a:graphic>
+      </p:graphicFrame>
     </p:spTree>
     <p:extLst>
       <p:ext uri="{BB962C8B-B14F-4D97-AF65-F5344CB8AC3E}">
@@ -20713,21 +21743,21 @@
 </file>
 
 <file path=customXml/item1.xml><?xml version="1.0" encoding="utf-8"?>
+<TemplafyTemplateConfiguration><![CDATA[{"elementsMetadata":[],"transformationConfigurations":[],"templateName":"Philips Master Template (updated margins)","templateDescription":"","enableDocumentContentUpdater":false,"version":"2.0"}]]></TemplafyTemplateConfiguration>
+</file>
+
+<file path=customXml/item2.xml><?xml version="1.0" encoding="utf-8"?>
 <TemplafyFormConfiguration><![CDATA[{"formFields":[],"formDataEntries":[]}]]></TemplafyFormConfiguration>
 </file>
 
-<file path=customXml/item2.xml><?xml version="1.0" encoding="utf-8"?>
-<TemplafyTemplateConfiguration><![CDATA[{"elementsMetadata":[],"transformationConfigurations":[],"templateName":"Philips Master Template (updated margins)","templateDescription":"","enableDocumentContentUpdater":false,"version":"2.0"}]]></TemplafyTemplateConfiguration>
-</file>
-
 <file path=customXml/itemProps1.xml><?xml version="1.0" encoding="utf-8"?>
-<ds:datastoreItem xmlns:ds="http://schemas.openxmlformats.org/officeDocument/2006/customXml" ds:itemID="{758FF650-907C-428F-AD7B-6BA9D849A6CB}">
+<ds:datastoreItem xmlns:ds="http://schemas.openxmlformats.org/officeDocument/2006/customXml" ds:itemID="{BFBCB3F7-860C-40CC-8532-A042390E68D6}">
   <ds:schemaRefs/>
 </ds:datastoreItem>
 </file>
 
 <file path=customXml/itemProps2.xml><?xml version="1.0" encoding="utf-8"?>
-<ds:datastoreItem xmlns:ds="http://schemas.openxmlformats.org/officeDocument/2006/customXml" ds:itemID="{BFBCB3F7-860C-40CC-8532-A042390E68D6}">
+<ds:datastoreItem xmlns:ds="http://schemas.openxmlformats.org/officeDocument/2006/customXml" ds:itemID="{758FF650-907C-428F-AD7B-6BA9D849A6CB}">
   <ds:schemaRefs/>
 </ds:datastoreItem>
 </file>
